--- a/docs/Team ServerMaya Submission _ AI Builder Cup.pptx
+++ b/docs/Team ServerMaya Submission _ AI Builder Cup.pptx
@@ -10860,6 +10860,402 @@
           </a:p>
         </p:txBody>
       </p:sp>
+      <p:pic>
+        <p:nvPicPr>
+          <p:cNvPr id="301" name="Prototype screenshot: Checks before shipping" descr="Prototype screenshot: Checks before shipping"/>
+          <p:cNvPicPr>
+            <a:picLocks noChangeAspect="1"/>
+          </p:cNvPicPr>
+          <p:nvPr/>
+        </p:nvPicPr>
+        <p:blipFill>
+          <a:blip r:embed="rId10"/>
+          <a:stretch>
+            <a:fillRect/>
+          </a:stretch>
+        </p:blipFill>
+        <p:spPr>
+          <a:xfrm>
+            <a:off x="347472" y="1188720"/>
+            <a:ext cx="2304288" cy="1645920"/>
+          </a:xfrm>
+          <a:prstGeom prst="rect">
+            <a:avLst/>
+          </a:prstGeom>
+          <a:ln w="9525">
+            <a:solidFill>
+              <a:srgbClr val="91A3B8"/>
+            </a:solidFill>
+          </a:ln>
+        </p:spPr>
+      </p:pic>
+      <p:sp>
+        <p:nvSpPr>
+          <p:cNvPr id="302" name="Shape 302"/>
+          <p:cNvSpPr txBox="1"/>
+          <p:nvPr/>
+        </p:nvSpPr>
+        <p:spPr>
+          <a:xfrm>
+            <a:off x="2798064" y="1207008"/>
+            <a:ext cx="1691640" cy="1645920"/>
+          </a:xfrm>
+          <a:prstGeom prst="roundRect">
+            <a:avLst>
+              <a:gd name="adj" fmla="val 10000"/>
+            </a:avLst>
+          </a:prstGeom>
+          <a:noFill/>
+          <a:ln>
+            <a:noFill/>
+          </a:ln>
+        </p:spPr>
+        <p:txBody>
+          <a:bodyPr wrap="square" lIns="0" tIns="0" rIns="0" bIns="0" anchor="t" rtlCol="0">
+            <a:noAutofit/>
+          </a:bodyPr>
+          <a:lstStyle/>
+          <a:p>
+            <a:pPr marL="0" indent="0" algn="l">
+              <a:spcBef>
+                <a:spcPts val="0"/>
+              </a:spcBef>
+              <a:buNone/>
+            </a:pPr>
+            <a:r>
+              <a:rPr lang="en-GB" sz="1100" dirty="0">
+                <a:solidFill>
+                  <a:srgbClr val="1F2937"/>
+                </a:solidFill>
+                <a:latin typeface="Google Sans Flex Medium"/>
+                <a:ea typeface="Google Sans Flex Medium"/>
+                <a:cs typeface="Google Sans Flex Medium"/>
+                <a:sym typeface="Google Sans Flex Medium"/>
+              </a:rPr>
+              <a:t>Checks before shipping</a:t>
+            </a:r>
+            <a:endParaRPr lang="en-GB" sz="1100"/>
+          </a:p>
+          <a:p>
+            <a:pPr marL="0" indent="0" algn="l">
+              <a:spcBef>
+                <a:spcPts val="400"/>
+              </a:spcBef>
+              <a:buNone/>
+            </a:pPr>
+            <a:r>
+              <a:rPr lang="en-GB" sz="900" dirty="0">
+                <a:solidFill>
+                  <a:srgbClr val="334155"/>
+                </a:solidFill>
+                <a:latin typeface="Google Sans Flex"/>
+                <a:ea typeface="Google Sans Flex"/>
+                <a:cs typeface="Google Sans Flex"/>
+                <a:sym typeface="Google Sans Flex"/>
+              </a:rPr>
+              <a:t>Beside the chat, the AI lists what to verify, quoting the customer, with what to do. Here: a code request, then a threat when the seller says no.</a:t>
+            </a:r>
+            <a:endParaRPr lang="en-GB" sz="900"/>
+          </a:p>
+        </p:txBody>
+      </p:sp>
+      <p:pic>
+        <p:nvPicPr>
+          <p:cNvPr id="303" name="Prototype screenshot: GCash receipt check" descr="Prototype screenshot: GCash receipt check"/>
+          <p:cNvPicPr>
+            <a:picLocks noChangeAspect="1"/>
+          </p:cNvPicPr>
+          <p:nvPr/>
+        </p:nvPicPr>
+        <p:blipFill>
+          <a:blip r:embed="rId11"/>
+          <a:stretch>
+            <a:fillRect/>
+          </a:stretch>
+        </p:blipFill>
+        <p:spPr>
+          <a:xfrm>
+            <a:off x="4645152" y="1188720"/>
+            <a:ext cx="2304288" cy="1645920"/>
+          </a:xfrm>
+          <a:prstGeom prst="rect">
+            <a:avLst/>
+          </a:prstGeom>
+          <a:ln w="9525">
+            <a:solidFill>
+              <a:srgbClr val="91A3B8"/>
+            </a:solidFill>
+          </a:ln>
+        </p:spPr>
+      </p:pic>
+      <p:sp>
+        <p:nvSpPr>
+          <p:cNvPr id="304" name="Shape 304"/>
+          <p:cNvSpPr txBox="1"/>
+          <p:nvPr/>
+        </p:nvSpPr>
+        <p:spPr>
+          <a:xfrm>
+            <a:off x="7095744" y="1207008"/>
+            <a:ext cx="1691640" cy="1645920"/>
+          </a:xfrm>
+          <a:prstGeom prst="roundRect">
+            <a:avLst>
+              <a:gd name="adj" fmla="val 10000"/>
+            </a:avLst>
+          </a:prstGeom>
+          <a:noFill/>
+          <a:ln>
+            <a:noFill/>
+          </a:ln>
+        </p:spPr>
+        <p:txBody>
+          <a:bodyPr wrap="square" lIns="0" tIns="0" rIns="0" bIns="0" anchor="t" rtlCol="0">
+            <a:noAutofit/>
+          </a:bodyPr>
+          <a:lstStyle/>
+          <a:p>
+            <a:pPr marL="0" indent="0" algn="l">
+              <a:spcBef>
+                <a:spcPts val="0"/>
+              </a:spcBef>
+              <a:buNone/>
+            </a:pPr>
+            <a:r>
+              <a:rPr lang="en-GB" sz="1100" dirty="0">
+                <a:solidFill>
+                  <a:srgbClr val="1F2937"/>
+                </a:solidFill>
+                <a:latin typeface="Google Sans Flex Medium"/>
+                <a:ea typeface="Google Sans Flex Medium"/>
+                <a:cs typeface="Google Sans Flex Medium"/>
+                <a:sym typeface="Google Sans Flex Medium"/>
+              </a:rPr>
+              <a:t>GCash receipt check</a:t>
+            </a:r>
+            <a:endParaRPr lang="en-GB" sz="1100"/>
+          </a:p>
+          <a:p>
+            <a:pPr marL="0" indent="0" algn="l">
+              <a:spcBef>
+                <a:spcPts val="400"/>
+              </a:spcBef>
+              <a:buNone/>
+            </a:pPr>
+            <a:r>
+              <a:rPr lang="en-GB" sz="900" dirty="0">
+                <a:solidFill>
+                  <a:srgbClr val="334155"/>
+                </a:solidFill>
+                <a:latin typeface="Google Sans Flex"/>
+                <a:ea typeface="Google Sans Flex"/>
+                <a:cs typeface="Google Sans Flex"/>
+                <a:sym typeface="Google Sans Flex"/>
+              </a:rPr>
+              <a:t>Gemini reads the screenshot; code checks it against the order and the seller's GCash account. The recipient doesn't fit, so it isn't proof.</a:t>
+            </a:r>
+            <a:endParaRPr lang="en-GB" sz="900"/>
+          </a:p>
+        </p:txBody>
+      </p:sp>
+      <p:pic>
+        <p:nvPicPr>
+          <p:cNvPr id="305" name="Prototype screenshot: AI claim review" descr="Prototype screenshot: AI claim review"/>
+          <p:cNvPicPr>
+            <a:picLocks noChangeAspect="1"/>
+          </p:cNvPicPr>
+          <p:nvPr/>
+        </p:nvPicPr>
+        <p:blipFill>
+          <a:blip r:embed="rId12"/>
+          <a:stretch>
+            <a:fillRect/>
+          </a:stretch>
+        </p:blipFill>
+        <p:spPr>
+          <a:xfrm>
+            <a:off x="347472" y="2999232"/>
+            <a:ext cx="2304288" cy="1645920"/>
+          </a:xfrm>
+          <a:prstGeom prst="rect">
+            <a:avLst/>
+          </a:prstGeom>
+          <a:ln w="9525">
+            <a:solidFill>
+              <a:srgbClr val="91A3B8"/>
+            </a:solidFill>
+          </a:ln>
+        </p:spPr>
+      </p:pic>
+      <p:sp>
+        <p:nvSpPr>
+          <p:cNvPr id="306" name="Shape 306"/>
+          <p:cNvSpPr txBox="1"/>
+          <p:nvPr/>
+        </p:nvSpPr>
+        <p:spPr>
+          <a:xfrm>
+            <a:off x="2798064" y="3017520"/>
+            <a:ext cx="1691640" cy="1645920"/>
+          </a:xfrm>
+          <a:prstGeom prst="roundRect">
+            <a:avLst>
+              <a:gd name="adj" fmla="val 10000"/>
+            </a:avLst>
+          </a:prstGeom>
+          <a:noFill/>
+          <a:ln>
+            <a:noFill/>
+          </a:ln>
+        </p:spPr>
+        <p:txBody>
+          <a:bodyPr wrap="square" lIns="0" tIns="0" rIns="0" bIns="0" anchor="t" rtlCol="0">
+            <a:noAutofit/>
+          </a:bodyPr>
+          <a:lstStyle/>
+          <a:p>
+            <a:pPr marL="0" indent="0" algn="l">
+              <a:spcBef>
+                <a:spcPts val="0"/>
+              </a:spcBef>
+              <a:buNone/>
+            </a:pPr>
+            <a:r>
+              <a:rPr lang="en-GB" sz="1100" dirty="0">
+                <a:solidFill>
+                  <a:srgbClr val="1F2937"/>
+                </a:solidFill>
+                <a:latin typeface="Google Sans Flex Medium"/>
+                <a:ea typeface="Google Sans Flex Medium"/>
+                <a:cs typeface="Google Sans Flex Medium"/>
+                <a:sym typeface="Google Sans Flex Medium"/>
+              </a:rPr>
+              <a:t>AI claim review</a:t>
+            </a:r>
+            <a:endParaRPr lang="en-GB" sz="1100"/>
+          </a:p>
+          <a:p>
+            <a:pPr marL="0" indent="0" algn="l">
+              <a:spcBef>
+                <a:spcPts val="400"/>
+              </a:spcBef>
+              <a:buNone/>
+            </a:pPr>
+            <a:r>
+              <a:rPr lang="en-GB" sz="900" dirty="0">
+                <a:solidFill>
+                  <a:srgbClr val="334155"/>
+                </a:solidFill>
+                <a:latin typeface="Google Sans Flex"/>
+                <a:ea typeface="Google Sans Flex"/>
+                <a:cs typeface="Google Sans Flex"/>
+                <a:sym typeface="Google Sans Flex"/>
+              </a:rPr>
+              <a:t>The ADK agent compares her photo and unboxing video with the packing records. Every finding cites the evidence it rests on.</a:t>
+            </a:r>
+            <a:endParaRPr lang="en-GB" sz="900"/>
+          </a:p>
+        </p:txBody>
+      </p:sp>
+      <p:pic>
+        <p:nvPicPr>
+          <p:cNvPr id="307" name="Prototype screenshot: Patterns across chats" descr="Prototype screenshot: Patterns across chats"/>
+          <p:cNvPicPr>
+            <a:picLocks noChangeAspect="1"/>
+          </p:cNvPicPr>
+          <p:nvPr/>
+        </p:nvPicPr>
+        <p:blipFill>
+          <a:blip r:embed="rId13"/>
+          <a:stretch>
+            <a:fillRect/>
+          </a:stretch>
+        </p:blipFill>
+        <p:spPr>
+          <a:xfrm>
+            <a:off x="4645152" y="2999232"/>
+            <a:ext cx="2304288" cy="1645920"/>
+          </a:xfrm>
+          <a:prstGeom prst="rect">
+            <a:avLst/>
+          </a:prstGeom>
+          <a:ln w="9525">
+            <a:solidFill>
+              <a:srgbClr val="91A3B8"/>
+            </a:solidFill>
+          </a:ln>
+        </p:spPr>
+      </p:pic>
+      <p:sp>
+        <p:nvSpPr>
+          <p:cNvPr id="308" name="Shape 308"/>
+          <p:cNvSpPr txBox="1"/>
+          <p:nvPr/>
+        </p:nvSpPr>
+        <p:spPr>
+          <a:xfrm>
+            <a:off x="7095744" y="3017520"/>
+            <a:ext cx="1691640" cy="1645920"/>
+          </a:xfrm>
+          <a:prstGeom prst="roundRect">
+            <a:avLst>
+              <a:gd name="adj" fmla="val 10000"/>
+            </a:avLst>
+          </a:prstGeom>
+          <a:noFill/>
+          <a:ln>
+            <a:noFill/>
+          </a:ln>
+        </p:spPr>
+        <p:txBody>
+          <a:bodyPr wrap="square" lIns="0" tIns="0" rIns="0" bIns="0" anchor="t" rtlCol="0">
+            <a:noAutofit/>
+          </a:bodyPr>
+          <a:lstStyle/>
+          <a:p>
+            <a:pPr marL="0" indent="0" algn="l">
+              <a:spcBef>
+                <a:spcPts val="0"/>
+              </a:spcBef>
+              <a:buNone/>
+            </a:pPr>
+            <a:r>
+              <a:rPr lang="en-GB" sz="1100" dirty="0">
+                <a:solidFill>
+                  <a:srgbClr val="1F2937"/>
+                </a:solidFill>
+                <a:latin typeface="Google Sans Flex Medium"/>
+                <a:ea typeface="Google Sans Flex Medium"/>
+                <a:cs typeface="Google Sans Flex Medium"/>
+                <a:sym typeface="Google Sans Flex Medium"/>
+              </a:rPr>
+              <a:t>Patterns across chats</a:t>
+            </a:r>
+            <a:endParaRPr lang="en-GB" sz="1100"/>
+          </a:p>
+          <a:p>
+            <a:pPr marL="0" indent="0" algn="l">
+              <a:spcBef>
+                <a:spcPts val="400"/>
+              </a:spcBef>
+              <a:buNone/>
+            </a:pPr>
+            <a:r>
+              <a:rPr lang="en-GB" sz="900" dirty="0">
+                <a:solidFill>
+                  <a:srgbClr val="334155"/>
+                </a:solidFill>
+                <a:latin typeface="Google Sans Flex"/>
+                <a:ea typeface="Google Sans Flex"/>
+                <a:cs typeface="Google Sans Flex"/>
+                <a:sym typeface="Google Sans Flex"/>
+              </a:rPr>
+              <a:t>Counts what the checks found across chats against the weeks before, and marks what changed since the seller's last look.</a:t>
+            </a:r>
+            <a:endParaRPr lang="en-GB" sz="900"/>
+          </a:p>
+        </p:txBody>
+      </p:sp>
     </p:spTree>
   </p:cSld>
   <p:clrMapOvr>
@@ -19643,6 +20039,4626 @@
               <a:cs typeface="Google Sans Flex Medium"/>
               <a:sym typeface="Google Sans Flex Medium"/>
             </a:endParaRPr>
+          </a:p>
+        </p:txBody>
+      </p:sp>
+      <p:sp>
+        <p:nvSpPr>
+          <p:cNvPr id="301" name="Shape 301"/>
+          <p:cNvSpPr txBox="1"/>
+          <p:nvPr/>
+        </p:nvSpPr>
+        <p:spPr>
+          <a:xfrm>
+            <a:off x="347472" y="1078992"/>
+            <a:ext cx="5413248" cy="201168"/>
+          </a:xfrm>
+          <a:prstGeom prst="roundRect">
+            <a:avLst>
+              <a:gd name="adj" fmla="val 10000"/>
+            </a:avLst>
+          </a:prstGeom>
+          <a:noFill/>
+          <a:ln>
+            <a:noFill/>
+          </a:ln>
+        </p:spPr>
+        <p:txBody>
+          <a:bodyPr wrap="square" lIns="0" tIns="0" rIns="0" bIns="0" anchor="t" rtlCol="0">
+            <a:noAutofit/>
+          </a:bodyPr>
+          <a:lstStyle/>
+          <a:p>
+            <a:pPr marL="0" indent="0" algn="l">
+              <a:spcBef>
+                <a:spcPts val="0"/>
+              </a:spcBef>
+              <a:buNone/>
+            </a:pPr>
+            <a:r>
+              <a:rPr lang="en-GB" sz="1100" dirty="0">
+                <a:solidFill>
+                  <a:srgbClr val="1F2937"/>
+                </a:solidFill>
+                <a:latin typeface="Google Sans Flex Medium"/>
+                <a:ea typeface="Google Sans Flex Medium"/>
+                <a:cs typeface="Google Sans Flex Medium"/>
+                <a:sym typeface="Google Sans Flex Medium"/>
+              </a:rPr>
+              <a:t>Conversations</a:t>
+            </a:r>
+            <a:endParaRPr lang="en-GB" sz="1100"/>
+          </a:p>
+        </p:txBody>
+      </p:sp>
+      <p:sp>
+        <p:nvSpPr>
+          <p:cNvPr id="302" name="Shape 302"/>
+          <p:cNvSpPr txBox="1"/>
+          <p:nvPr/>
+        </p:nvSpPr>
+        <p:spPr>
+          <a:xfrm>
+            <a:off x="347472" y="1261872"/>
+            <a:ext cx="5413248" cy="182880"/>
+          </a:xfrm>
+          <a:prstGeom prst="roundRect">
+            <a:avLst>
+              <a:gd name="adj" fmla="val 10000"/>
+            </a:avLst>
+          </a:prstGeom>
+          <a:noFill/>
+          <a:ln>
+            <a:noFill/>
+          </a:ln>
+        </p:spPr>
+        <p:txBody>
+          <a:bodyPr wrap="square" lIns="0" tIns="0" rIns="0" bIns="0" anchor="t" rtlCol="0">
+            <a:noAutofit/>
+          </a:bodyPr>
+          <a:lstStyle/>
+          <a:p>
+            <a:pPr marL="0" indent="0" algn="l">
+              <a:spcBef>
+                <a:spcPts val="0"/>
+              </a:spcBef>
+              <a:buNone/>
+            </a:pPr>
+            <a:r>
+              <a:rPr lang="en-GB" sz="850" dirty="0">
+                <a:solidFill>
+                  <a:srgbClr val="5B6678"/>
+                </a:solidFill>
+                <a:latin typeface="Google Sans Flex"/>
+                <a:ea typeface="Google Sans Flex"/>
+                <a:cs typeface="Google Sans Flex"/>
+                <a:sym typeface="Google Sans Flex"/>
+              </a:rPr>
+              <a:t>The seller works each chat with the AI's reading of it beside it</a:t>
+            </a:r>
+            <a:endParaRPr lang="en-GB" sz="850"/>
+          </a:p>
+        </p:txBody>
+      </p:sp>
+      <p:sp>
+        <p:nvSpPr>
+          <p:cNvPr id="303" name="Shape 303"/>
+          <p:cNvSpPr/>
+          <p:nvPr/>
+        </p:nvSpPr>
+        <p:spPr>
+          <a:xfrm>
+            <a:off x="347472" y="1463040"/>
+            <a:ext cx="5413248" cy="3090672"/>
+          </a:xfrm>
+          <a:prstGeom prst="roundRect">
+            <a:avLst>
+              <a:gd name="adj" fmla="val 3000"/>
+            </a:avLst>
+          </a:prstGeom>
+          <a:solidFill>
+            <a:srgbClr val="FFFFFF"/>
+          </a:solidFill>
+          <a:ln w="8900">
+            <a:solidFill>
+              <a:srgbClr val="91A3B8"/>
+            </a:solidFill>
+            <a:prstDash val="solid"/>
+          </a:ln>
+        </p:spPr>
+        <p:txBody>
+          <a:bodyPr wrap="square" lIns="36576" tIns="36576" rIns="36576" bIns="36576" anchor="t" rtlCol="0">
+            <a:noAutofit/>
+          </a:bodyPr>
+          <a:lstStyle/>
+          <a:p>
+            <a:pPr marL="0" indent="0" algn="l">
+              <a:spcBef>
+                <a:spcPts val="0"/>
+              </a:spcBef>
+              <a:buNone/>
+            </a:pPr>
+            <a:endParaRPr lang="en-GB" sz="800"/>
+          </a:p>
+        </p:txBody>
+      </p:sp>
+      <p:sp>
+        <p:nvSpPr>
+          <p:cNvPr id="304" name="Shape 304"/>
+          <p:cNvSpPr/>
+          <p:nvPr/>
+        </p:nvSpPr>
+        <p:spPr>
+          <a:xfrm>
+            <a:off x="347472" y="1463040"/>
+            <a:ext cx="5413248" cy="246888"/>
+          </a:xfrm>
+          <a:prstGeom prst="rect">
+            <a:avLst/>
+          </a:prstGeom>
+          <a:solidFill>
+            <a:srgbClr val="F1F3F5"/>
+          </a:solidFill>
+          <a:ln>
+            <a:noFill/>
+          </a:ln>
+        </p:spPr>
+        <p:txBody>
+          <a:bodyPr wrap="square" lIns="91440" tIns="91440" rIns="91440" bIns="91440" anchor="ctr" rtlCol="0">
+            <a:noAutofit/>
+          </a:bodyPr>
+          <a:lstStyle/>
+          <a:p>
+            <a:pPr marL="0" indent="0" algn="l">
+              <a:spcBef>
+                <a:spcPts val="0"/>
+              </a:spcBef>
+              <a:buNone/>
+            </a:pPr>
+            <a:r>
+              <a:rPr lang="en-GB" sz="750" dirty="0">
+                <a:solidFill>
+                  <a:srgbClr val="334155"/>
+                </a:solidFill>
+                <a:latin typeface="Google Sans Flex Medium"/>
+                <a:ea typeface="Google Sans Flex Medium"/>
+                <a:cs typeface="Google Sans Flex Medium"/>
+                <a:sym typeface="Google Sans Flex Medium"/>
+              </a:rPr>
+              <a:t>Suri     Conversations     Orders     Patterns     Settings</a:t>
+            </a:r>
+            <a:endParaRPr lang="en-GB" sz="750"/>
+          </a:p>
+        </p:txBody>
+      </p:sp>
+      <p:sp>
+        <p:nvSpPr>
+          <p:cNvPr id="305" name="Shape 305"/>
+          <p:cNvSpPr/>
+          <p:nvPr/>
+        </p:nvSpPr>
+        <p:spPr>
+          <a:xfrm>
+            <a:off x="347472" y="1709928"/>
+            <a:ext cx="1207008" cy="2843784"/>
+          </a:xfrm>
+          <a:prstGeom prst="rect">
+            <a:avLst/>
+          </a:prstGeom>
+          <a:noFill/>
+          <a:ln w="8900">
+            <a:solidFill>
+              <a:srgbClr val="91A3B8"/>
+            </a:solidFill>
+            <a:prstDash val="solid"/>
+          </a:ln>
+        </p:spPr>
+        <p:txBody>
+          <a:bodyPr wrap="square" lIns="36576" tIns="36576" rIns="36576" bIns="36576" anchor="t" rtlCol="0">
+            <a:noAutofit/>
+          </a:bodyPr>
+          <a:lstStyle/>
+          <a:p>
+            <a:pPr marL="0" indent="0" algn="l">
+              <a:spcBef>
+                <a:spcPts val="0"/>
+              </a:spcBef>
+              <a:buNone/>
+            </a:pPr>
+            <a:endParaRPr lang="en-GB" sz="800"/>
+          </a:p>
+        </p:txBody>
+      </p:sp>
+      <p:sp>
+        <p:nvSpPr>
+          <p:cNvPr id="306" name="Shape 306"/>
+          <p:cNvSpPr txBox="1"/>
+          <p:nvPr/>
+        </p:nvSpPr>
+        <p:spPr>
+          <a:xfrm>
+            <a:off x="420624" y="1764792"/>
+            <a:ext cx="914400" cy="164592"/>
+          </a:xfrm>
+          <a:prstGeom prst="roundRect">
+            <a:avLst>
+              <a:gd name="adj" fmla="val 10000"/>
+            </a:avLst>
+          </a:prstGeom>
+          <a:noFill/>
+          <a:ln>
+            <a:noFill/>
+          </a:ln>
+        </p:spPr>
+        <p:txBody>
+          <a:bodyPr wrap="square" lIns="0" tIns="0" rIns="0" bIns="0" anchor="t" rtlCol="0">
+            <a:noAutofit/>
+          </a:bodyPr>
+          <a:lstStyle/>
+          <a:p>
+            <a:pPr marL="0" indent="0" algn="l">
+              <a:spcBef>
+                <a:spcPts val="0"/>
+              </a:spcBef>
+              <a:buNone/>
+            </a:pPr>
+            <a:r>
+              <a:rPr lang="en-GB" sz="750" dirty="0">
+                <a:solidFill>
+                  <a:srgbClr val="1F2937"/>
+                </a:solidFill>
+                <a:latin typeface="Google Sans Flex Medium"/>
+                <a:ea typeface="Google Sans Flex Medium"/>
+                <a:cs typeface="Google Sans Flex Medium"/>
+                <a:sym typeface="Google Sans Flex Medium"/>
+              </a:rPr>
+              <a:t>Chats</a:t>
+            </a:r>
+            <a:endParaRPr lang="en-GB" sz="750"/>
+          </a:p>
+        </p:txBody>
+      </p:sp>
+      <p:sp>
+        <p:nvSpPr>
+          <p:cNvPr id="307" name="Shape 307"/>
+          <p:cNvSpPr/>
+          <p:nvPr/>
+        </p:nvSpPr>
+        <p:spPr>
+          <a:xfrm>
+            <a:off x="384048" y="1947672"/>
+            <a:ext cx="1133856" cy="457200"/>
+          </a:xfrm>
+          <a:prstGeom prst="roundRect">
+            <a:avLst>
+              <a:gd name="adj" fmla="val 8000"/>
+            </a:avLst>
+          </a:prstGeom>
+          <a:solidFill>
+            <a:srgbClr val="E5F0FF"/>
+          </a:solidFill>
+          <a:ln>
+            <a:noFill/>
+          </a:ln>
+        </p:spPr>
+        <p:txBody>
+          <a:bodyPr wrap="square" lIns="36576" tIns="36576" rIns="36576" bIns="36576" anchor="t" rtlCol="0">
+            <a:noAutofit/>
+          </a:bodyPr>
+          <a:lstStyle/>
+          <a:p>
+            <a:pPr marL="0" indent="0" algn="l">
+              <a:spcBef>
+                <a:spcPts val="0"/>
+              </a:spcBef>
+              <a:buNone/>
+            </a:pPr>
+            <a:endParaRPr lang="en-GB" sz="800"/>
+          </a:p>
+        </p:txBody>
+      </p:sp>
+      <p:sp>
+        <p:nvSpPr>
+          <p:cNvPr id="308" name="Shape 308"/>
+          <p:cNvSpPr/>
+          <p:nvPr/>
+        </p:nvSpPr>
+        <p:spPr>
+          <a:xfrm>
+            <a:off x="429768" y="2002536"/>
+            <a:ext cx="182880" cy="182880"/>
+          </a:xfrm>
+          <a:prstGeom prst="ellipse">
+            <a:avLst/>
+          </a:prstGeom>
+          <a:solidFill>
+            <a:srgbClr val="C3CCD6"/>
+          </a:solidFill>
+          <a:ln>
+            <a:noFill/>
+          </a:ln>
+        </p:spPr>
+        <p:txBody>
+          <a:bodyPr wrap="square" lIns="0" tIns="0" rIns="0" bIns="0" anchor="ctr" rtlCol="0">
+            <a:noAutofit/>
+          </a:bodyPr>
+          <a:lstStyle/>
+          <a:p>
+            <a:pPr marL="0" indent="0" algn="ctr">
+              <a:spcBef>
+                <a:spcPts val="0"/>
+              </a:spcBef>
+              <a:buNone/>
+            </a:pPr>
+            <a:endParaRPr lang="en-GB" sz="700"/>
+          </a:p>
+        </p:txBody>
+      </p:sp>
+      <p:sp>
+        <p:nvSpPr>
+          <p:cNvPr id="309" name="Shape 309"/>
+          <p:cNvSpPr txBox="1"/>
+          <p:nvPr/>
+        </p:nvSpPr>
+        <p:spPr>
+          <a:xfrm>
+            <a:off x="658368" y="1984248"/>
+            <a:ext cx="868680" cy="137160"/>
+          </a:xfrm>
+          <a:prstGeom prst="roundRect">
+            <a:avLst>
+              <a:gd name="adj" fmla="val 10000"/>
+            </a:avLst>
+          </a:prstGeom>
+          <a:noFill/>
+          <a:ln>
+            <a:noFill/>
+          </a:ln>
+        </p:spPr>
+        <p:txBody>
+          <a:bodyPr wrap="square" lIns="0" tIns="0" rIns="0" bIns="0" anchor="t" rtlCol="0">
+            <a:noAutofit/>
+          </a:bodyPr>
+          <a:lstStyle/>
+          <a:p>
+            <a:pPr marL="0" indent="0" algn="l">
+              <a:spcBef>
+                <a:spcPts val="0"/>
+              </a:spcBef>
+              <a:buNone/>
+            </a:pPr>
+            <a:r>
+              <a:rPr lang="en-GB" sz="650" dirty="0">
+                <a:solidFill>
+                  <a:srgbClr val="1F2937"/>
+                </a:solidFill>
+                <a:latin typeface="Google Sans Flex Medium"/>
+                <a:ea typeface="Google Sans Flex Medium"/>
+                <a:cs typeface="Google Sans Flex Medium"/>
+                <a:sym typeface="Google Sans Flex Medium"/>
+              </a:rPr>
+              <a:t>Mark Dizon</a:t>
+            </a:r>
+            <a:endParaRPr lang="en-GB" sz="650"/>
+          </a:p>
+        </p:txBody>
+      </p:sp>
+      <p:sp>
+        <p:nvSpPr>
+          <p:cNvPr id="310" name="Shape 310"/>
+          <p:cNvSpPr/>
+          <p:nvPr/>
+        </p:nvSpPr>
+        <p:spPr>
+          <a:xfrm>
+            <a:off x="658368" y="2139696"/>
+            <a:ext cx="731520" cy="41148"/>
+          </a:xfrm>
+          <a:prstGeom prst="roundRect">
+            <a:avLst>
+              <a:gd name="adj" fmla="val 50000"/>
+            </a:avLst>
+          </a:prstGeom>
+          <a:solidFill>
+            <a:srgbClr val="D5DBE3"/>
+          </a:solidFill>
+          <a:ln>
+            <a:noFill/>
+          </a:ln>
+        </p:spPr>
+        <p:txBody>
+          <a:bodyPr wrap="square" lIns="36576" tIns="36576" rIns="36576" bIns="36576" anchor="t" rtlCol="0">
+            <a:noAutofit/>
+          </a:bodyPr>
+          <a:lstStyle/>
+          <a:p>
+            <a:pPr marL="0" indent="0" algn="l">
+              <a:spcBef>
+                <a:spcPts val="0"/>
+              </a:spcBef>
+              <a:buNone/>
+            </a:pPr>
+            <a:endParaRPr lang="en-GB" sz="800"/>
+          </a:p>
+        </p:txBody>
+      </p:sp>
+      <p:sp>
+        <p:nvSpPr>
+          <p:cNvPr id="311" name="Shape 311"/>
+          <p:cNvSpPr/>
+          <p:nvPr/>
+        </p:nvSpPr>
+        <p:spPr>
+          <a:xfrm>
+            <a:off x="658368" y="2231136"/>
+            <a:ext cx="841248" cy="128016"/>
+          </a:xfrm>
+          <a:prstGeom prst="roundRect">
+            <a:avLst>
+              <a:gd name="adj" fmla="val 30000"/>
+            </a:avLst>
+          </a:prstGeom>
+          <a:solidFill>
+            <a:srgbClr val="FDF1DF"/>
+          </a:solidFill>
+          <a:ln>
+            <a:noFill/>
+          </a:ln>
+        </p:spPr>
+        <p:txBody>
+          <a:bodyPr wrap="square" lIns="18288" tIns="18288" rIns="18288" bIns="18288" anchor="ctr" rtlCol="0">
+            <a:noAutofit/>
+          </a:bodyPr>
+          <a:lstStyle/>
+          <a:p>
+            <a:pPr marL="0" indent="0" algn="l">
+              <a:spcBef>
+                <a:spcPts val="0"/>
+              </a:spcBef>
+              <a:buNone/>
+            </a:pPr>
+            <a:r>
+              <a:rPr lang="en-GB" sz="550" dirty="0">
+                <a:solidFill>
+                  <a:srgbClr val="9A5B13"/>
+                </a:solidFill>
+                <a:latin typeface="Google Sans Flex"/>
+                <a:ea typeface="Google Sans Flex"/>
+                <a:cs typeface="Google Sans Flex"/>
+                <a:sym typeface="Google Sans Flex"/>
+              </a:rPr>
+              <a:t>2 checks before shipping</a:t>
+            </a:r>
+            <a:endParaRPr lang="en-GB" sz="550"/>
+          </a:p>
+        </p:txBody>
+      </p:sp>
+      <p:sp>
+        <p:nvSpPr>
+          <p:cNvPr id="312" name="Shape 312"/>
+          <p:cNvSpPr/>
+          <p:nvPr/>
+        </p:nvSpPr>
+        <p:spPr>
+          <a:xfrm>
+            <a:off x="429768" y="2487168"/>
+            <a:ext cx="182880" cy="182880"/>
+          </a:xfrm>
+          <a:prstGeom prst="ellipse">
+            <a:avLst/>
+          </a:prstGeom>
+          <a:solidFill>
+            <a:srgbClr val="C3CCD6"/>
+          </a:solidFill>
+          <a:ln>
+            <a:noFill/>
+          </a:ln>
+        </p:spPr>
+        <p:txBody>
+          <a:bodyPr wrap="square" lIns="0" tIns="0" rIns="0" bIns="0" anchor="ctr" rtlCol="0">
+            <a:noAutofit/>
+          </a:bodyPr>
+          <a:lstStyle/>
+          <a:p>
+            <a:pPr marL="0" indent="0" algn="ctr">
+              <a:spcBef>
+                <a:spcPts val="0"/>
+              </a:spcBef>
+              <a:buNone/>
+            </a:pPr>
+            <a:endParaRPr lang="en-GB" sz="700"/>
+          </a:p>
+        </p:txBody>
+      </p:sp>
+      <p:sp>
+        <p:nvSpPr>
+          <p:cNvPr id="313" name="Shape 313"/>
+          <p:cNvSpPr txBox="1"/>
+          <p:nvPr/>
+        </p:nvSpPr>
+        <p:spPr>
+          <a:xfrm>
+            <a:off x="658368" y="2468880"/>
+            <a:ext cx="868680" cy="137160"/>
+          </a:xfrm>
+          <a:prstGeom prst="roundRect">
+            <a:avLst>
+              <a:gd name="adj" fmla="val 10000"/>
+            </a:avLst>
+          </a:prstGeom>
+          <a:noFill/>
+          <a:ln>
+            <a:noFill/>
+          </a:ln>
+        </p:spPr>
+        <p:txBody>
+          <a:bodyPr wrap="square" lIns="0" tIns="0" rIns="0" bIns="0" anchor="t" rtlCol="0">
+            <a:noAutofit/>
+          </a:bodyPr>
+          <a:lstStyle/>
+          <a:p>
+            <a:pPr marL="0" indent="0" algn="l">
+              <a:spcBef>
+                <a:spcPts val="0"/>
+              </a:spcBef>
+              <a:buNone/>
+            </a:pPr>
+            <a:r>
+              <a:rPr lang="en-GB" sz="650" dirty="0">
+                <a:solidFill>
+                  <a:srgbClr val="1F2937"/>
+                </a:solidFill>
+                <a:latin typeface="Google Sans Flex Medium"/>
+                <a:ea typeface="Google Sans Flex Medium"/>
+                <a:cs typeface="Google Sans Flex Medium"/>
+                <a:sym typeface="Google Sans Flex Medium"/>
+              </a:rPr>
+              <a:t>Dan Cortez</a:t>
+            </a:r>
+            <a:endParaRPr lang="en-GB" sz="650"/>
+          </a:p>
+        </p:txBody>
+      </p:sp>
+      <p:sp>
+        <p:nvSpPr>
+          <p:cNvPr id="314" name="Shape 314"/>
+          <p:cNvSpPr/>
+          <p:nvPr/>
+        </p:nvSpPr>
+        <p:spPr>
+          <a:xfrm>
+            <a:off x="658368" y="2624328"/>
+            <a:ext cx="731520" cy="41148"/>
+          </a:xfrm>
+          <a:prstGeom prst="roundRect">
+            <a:avLst>
+              <a:gd name="adj" fmla="val 50000"/>
+            </a:avLst>
+          </a:prstGeom>
+          <a:solidFill>
+            <a:srgbClr val="D5DBE3"/>
+          </a:solidFill>
+          <a:ln>
+            <a:noFill/>
+          </a:ln>
+        </p:spPr>
+        <p:txBody>
+          <a:bodyPr wrap="square" lIns="36576" tIns="36576" rIns="36576" bIns="36576" anchor="t" rtlCol="0">
+            <a:noAutofit/>
+          </a:bodyPr>
+          <a:lstStyle/>
+          <a:p>
+            <a:pPr marL="0" indent="0" algn="l">
+              <a:spcBef>
+                <a:spcPts val="0"/>
+              </a:spcBef>
+              <a:buNone/>
+            </a:pPr>
+            <a:endParaRPr lang="en-GB" sz="800"/>
+          </a:p>
+        </p:txBody>
+      </p:sp>
+      <p:sp>
+        <p:nvSpPr>
+          <p:cNvPr id="315" name="Shape 315"/>
+          <p:cNvSpPr/>
+          <p:nvPr/>
+        </p:nvSpPr>
+        <p:spPr>
+          <a:xfrm>
+            <a:off x="658368" y="2715768"/>
+            <a:ext cx="841248" cy="128016"/>
+          </a:xfrm>
+          <a:prstGeom prst="roundRect">
+            <a:avLst>
+              <a:gd name="adj" fmla="val 30000"/>
+            </a:avLst>
+          </a:prstGeom>
+          <a:solidFill>
+            <a:srgbClr val="FDF1DF"/>
+          </a:solidFill>
+          <a:ln>
+            <a:noFill/>
+          </a:ln>
+        </p:spPr>
+        <p:txBody>
+          <a:bodyPr wrap="square" lIns="18288" tIns="18288" rIns="18288" bIns="18288" anchor="ctr" rtlCol="0">
+            <a:noAutofit/>
+          </a:bodyPr>
+          <a:lstStyle/>
+          <a:p>
+            <a:pPr marL="0" indent="0" algn="l">
+              <a:spcBef>
+                <a:spcPts val="0"/>
+              </a:spcBef>
+              <a:buNone/>
+            </a:pPr>
+            <a:r>
+              <a:rPr lang="en-GB" sz="550" dirty="0">
+                <a:solidFill>
+                  <a:srgbClr val="9A5B13"/>
+                </a:solidFill>
+                <a:latin typeface="Google Sans Flex"/>
+                <a:ea typeface="Google Sans Flex"/>
+                <a:cs typeface="Google Sans Flex"/>
+                <a:sym typeface="Google Sans Flex"/>
+              </a:rPr>
+              <a:t>3 checks before shipping</a:t>
+            </a:r>
+            <a:endParaRPr lang="en-GB" sz="550"/>
+          </a:p>
+        </p:txBody>
+      </p:sp>
+      <p:sp>
+        <p:nvSpPr>
+          <p:cNvPr id="316" name="Shape 316"/>
+          <p:cNvSpPr/>
+          <p:nvPr/>
+        </p:nvSpPr>
+        <p:spPr>
+          <a:xfrm>
+            <a:off x="429768" y="2971800"/>
+            <a:ext cx="182880" cy="182880"/>
+          </a:xfrm>
+          <a:prstGeom prst="ellipse">
+            <a:avLst/>
+          </a:prstGeom>
+          <a:solidFill>
+            <a:srgbClr val="C3CCD6"/>
+          </a:solidFill>
+          <a:ln>
+            <a:noFill/>
+          </a:ln>
+        </p:spPr>
+        <p:txBody>
+          <a:bodyPr wrap="square" lIns="0" tIns="0" rIns="0" bIns="0" anchor="ctr" rtlCol="0">
+            <a:noAutofit/>
+          </a:bodyPr>
+          <a:lstStyle/>
+          <a:p>
+            <a:pPr marL="0" indent="0" algn="ctr">
+              <a:spcBef>
+                <a:spcPts val="0"/>
+              </a:spcBef>
+              <a:buNone/>
+            </a:pPr>
+            <a:endParaRPr lang="en-GB" sz="700"/>
+          </a:p>
+        </p:txBody>
+      </p:sp>
+      <p:sp>
+        <p:nvSpPr>
+          <p:cNvPr id="317" name="Shape 317"/>
+          <p:cNvSpPr txBox="1"/>
+          <p:nvPr/>
+        </p:nvSpPr>
+        <p:spPr>
+          <a:xfrm>
+            <a:off x="658368" y="2953512"/>
+            <a:ext cx="868680" cy="137160"/>
+          </a:xfrm>
+          <a:prstGeom prst="roundRect">
+            <a:avLst>
+              <a:gd name="adj" fmla="val 10000"/>
+            </a:avLst>
+          </a:prstGeom>
+          <a:noFill/>
+          <a:ln>
+            <a:noFill/>
+          </a:ln>
+        </p:spPr>
+        <p:txBody>
+          <a:bodyPr wrap="square" lIns="0" tIns="0" rIns="0" bIns="0" anchor="t" rtlCol="0">
+            <a:noAutofit/>
+          </a:bodyPr>
+          <a:lstStyle/>
+          <a:p>
+            <a:pPr marL="0" indent="0" algn="l">
+              <a:spcBef>
+                <a:spcPts val="0"/>
+              </a:spcBef>
+              <a:buNone/>
+            </a:pPr>
+            <a:r>
+              <a:rPr lang="en-GB" sz="650" dirty="0">
+                <a:solidFill>
+                  <a:srgbClr val="1F2937"/>
+                </a:solidFill>
+                <a:latin typeface="Google Sans Flex Medium"/>
+                <a:ea typeface="Google Sans Flex Medium"/>
+                <a:cs typeface="Google Sans Flex Medium"/>
+                <a:sym typeface="Google Sans Flex Medium"/>
+              </a:rPr>
+              <a:t>Bea Villanueva</a:t>
+            </a:r>
+            <a:endParaRPr lang="en-GB" sz="650"/>
+          </a:p>
+        </p:txBody>
+      </p:sp>
+      <p:sp>
+        <p:nvSpPr>
+          <p:cNvPr id="318" name="Shape 318"/>
+          <p:cNvSpPr/>
+          <p:nvPr/>
+        </p:nvSpPr>
+        <p:spPr>
+          <a:xfrm>
+            <a:off x="658368" y="3108960"/>
+            <a:ext cx="731520" cy="41148"/>
+          </a:xfrm>
+          <a:prstGeom prst="roundRect">
+            <a:avLst>
+              <a:gd name="adj" fmla="val 50000"/>
+            </a:avLst>
+          </a:prstGeom>
+          <a:solidFill>
+            <a:srgbClr val="D5DBE3"/>
+          </a:solidFill>
+          <a:ln>
+            <a:noFill/>
+          </a:ln>
+        </p:spPr>
+        <p:txBody>
+          <a:bodyPr wrap="square" lIns="36576" tIns="36576" rIns="36576" bIns="36576" anchor="t" rtlCol="0">
+            <a:noAutofit/>
+          </a:bodyPr>
+          <a:lstStyle/>
+          <a:p>
+            <a:pPr marL="0" indent="0" algn="l">
+              <a:spcBef>
+                <a:spcPts val="0"/>
+              </a:spcBef>
+              <a:buNone/>
+            </a:pPr>
+            <a:endParaRPr lang="en-GB" sz="800"/>
+          </a:p>
+        </p:txBody>
+      </p:sp>
+      <p:sp>
+        <p:nvSpPr>
+          <p:cNvPr id="319" name="Shape 319"/>
+          <p:cNvSpPr/>
+          <p:nvPr/>
+        </p:nvSpPr>
+        <p:spPr>
+          <a:xfrm>
+            <a:off x="429768" y="3456432"/>
+            <a:ext cx="182880" cy="182880"/>
+          </a:xfrm>
+          <a:prstGeom prst="ellipse">
+            <a:avLst/>
+          </a:prstGeom>
+          <a:solidFill>
+            <a:srgbClr val="C3CCD6"/>
+          </a:solidFill>
+          <a:ln>
+            <a:noFill/>
+          </a:ln>
+        </p:spPr>
+        <p:txBody>
+          <a:bodyPr wrap="square" lIns="0" tIns="0" rIns="0" bIns="0" anchor="ctr" rtlCol="0">
+            <a:noAutofit/>
+          </a:bodyPr>
+          <a:lstStyle/>
+          <a:p>
+            <a:pPr marL="0" indent="0" algn="ctr">
+              <a:spcBef>
+                <a:spcPts val="0"/>
+              </a:spcBef>
+              <a:buNone/>
+            </a:pPr>
+            <a:endParaRPr lang="en-GB" sz="700"/>
+          </a:p>
+        </p:txBody>
+      </p:sp>
+      <p:sp>
+        <p:nvSpPr>
+          <p:cNvPr id="320" name="Shape 320"/>
+          <p:cNvSpPr txBox="1"/>
+          <p:nvPr/>
+        </p:nvSpPr>
+        <p:spPr>
+          <a:xfrm>
+            <a:off x="658368" y="3438144"/>
+            <a:ext cx="868680" cy="137160"/>
+          </a:xfrm>
+          <a:prstGeom prst="roundRect">
+            <a:avLst>
+              <a:gd name="adj" fmla="val 10000"/>
+            </a:avLst>
+          </a:prstGeom>
+          <a:noFill/>
+          <a:ln>
+            <a:noFill/>
+          </a:ln>
+        </p:spPr>
+        <p:txBody>
+          <a:bodyPr wrap="square" lIns="0" tIns="0" rIns="0" bIns="0" anchor="t" rtlCol="0">
+            <a:noAutofit/>
+          </a:bodyPr>
+          <a:lstStyle/>
+          <a:p>
+            <a:pPr marL="0" indent="0" algn="l">
+              <a:spcBef>
+                <a:spcPts val="0"/>
+              </a:spcBef>
+              <a:buNone/>
+            </a:pPr>
+            <a:r>
+              <a:rPr lang="en-GB" sz="650" dirty="0">
+                <a:solidFill>
+                  <a:srgbClr val="1F2937"/>
+                </a:solidFill>
+                <a:latin typeface="Google Sans Flex Medium"/>
+                <a:ea typeface="Google Sans Flex Medium"/>
+                <a:cs typeface="Google Sans Flex Medium"/>
+                <a:sym typeface="Google Sans Flex Medium"/>
+              </a:rPr>
+              <a:t>Carla Villamor</a:t>
+            </a:r>
+            <a:endParaRPr lang="en-GB" sz="650"/>
+          </a:p>
+        </p:txBody>
+      </p:sp>
+      <p:sp>
+        <p:nvSpPr>
+          <p:cNvPr id="321" name="Shape 321"/>
+          <p:cNvSpPr/>
+          <p:nvPr/>
+        </p:nvSpPr>
+        <p:spPr>
+          <a:xfrm>
+            <a:off x="658368" y="3593591"/>
+            <a:ext cx="731520" cy="41148"/>
+          </a:xfrm>
+          <a:prstGeom prst="roundRect">
+            <a:avLst>
+              <a:gd name="adj" fmla="val 50000"/>
+            </a:avLst>
+          </a:prstGeom>
+          <a:solidFill>
+            <a:srgbClr val="D5DBE3"/>
+          </a:solidFill>
+          <a:ln>
+            <a:noFill/>
+          </a:ln>
+        </p:spPr>
+        <p:txBody>
+          <a:bodyPr wrap="square" lIns="36576" tIns="36576" rIns="36576" bIns="36576" anchor="t" rtlCol="0">
+            <a:noAutofit/>
+          </a:bodyPr>
+          <a:lstStyle/>
+          <a:p>
+            <a:pPr marL="0" indent="0" algn="l">
+              <a:spcBef>
+                <a:spcPts val="0"/>
+              </a:spcBef>
+              <a:buNone/>
+            </a:pPr>
+            <a:endParaRPr lang="en-GB" sz="800"/>
+          </a:p>
+        </p:txBody>
+      </p:sp>
+      <p:sp>
+        <p:nvSpPr>
+          <p:cNvPr id="322" name="Shape 322"/>
+          <p:cNvSpPr/>
+          <p:nvPr/>
+        </p:nvSpPr>
+        <p:spPr>
+          <a:xfrm>
+            <a:off x="429768" y="3941063"/>
+            <a:ext cx="182880" cy="182880"/>
+          </a:xfrm>
+          <a:prstGeom prst="ellipse">
+            <a:avLst/>
+          </a:prstGeom>
+          <a:solidFill>
+            <a:srgbClr val="C3CCD6"/>
+          </a:solidFill>
+          <a:ln>
+            <a:noFill/>
+          </a:ln>
+        </p:spPr>
+        <p:txBody>
+          <a:bodyPr wrap="square" lIns="0" tIns="0" rIns="0" bIns="0" anchor="ctr" rtlCol="0">
+            <a:noAutofit/>
+          </a:bodyPr>
+          <a:lstStyle/>
+          <a:p>
+            <a:pPr marL="0" indent="0" algn="ctr">
+              <a:spcBef>
+                <a:spcPts val="0"/>
+              </a:spcBef>
+              <a:buNone/>
+            </a:pPr>
+            <a:endParaRPr lang="en-GB" sz="700"/>
+          </a:p>
+        </p:txBody>
+      </p:sp>
+      <p:sp>
+        <p:nvSpPr>
+          <p:cNvPr id="323" name="Shape 323"/>
+          <p:cNvSpPr txBox="1"/>
+          <p:nvPr/>
+        </p:nvSpPr>
+        <p:spPr>
+          <a:xfrm>
+            <a:off x="658368" y="3922776"/>
+            <a:ext cx="868680" cy="137160"/>
+          </a:xfrm>
+          <a:prstGeom prst="roundRect">
+            <a:avLst>
+              <a:gd name="adj" fmla="val 10000"/>
+            </a:avLst>
+          </a:prstGeom>
+          <a:noFill/>
+          <a:ln>
+            <a:noFill/>
+          </a:ln>
+        </p:spPr>
+        <p:txBody>
+          <a:bodyPr wrap="square" lIns="0" tIns="0" rIns="0" bIns="0" anchor="t" rtlCol="0">
+            <a:noAutofit/>
+          </a:bodyPr>
+          <a:lstStyle/>
+          <a:p>
+            <a:pPr marL="0" indent="0" algn="l">
+              <a:spcBef>
+                <a:spcPts val="0"/>
+              </a:spcBef>
+              <a:buNone/>
+            </a:pPr>
+            <a:r>
+              <a:rPr lang="en-GB" sz="650" dirty="0">
+                <a:solidFill>
+                  <a:srgbClr val="1F2937"/>
+                </a:solidFill>
+                <a:latin typeface="Google Sans Flex Medium"/>
+                <a:ea typeface="Google Sans Flex Medium"/>
+                <a:cs typeface="Google Sans Flex Medium"/>
+                <a:sym typeface="Google Sans Flex Medium"/>
+              </a:rPr>
+              <a:t>Ana Reyes</a:t>
+            </a:r>
+            <a:endParaRPr lang="en-GB" sz="650"/>
+          </a:p>
+        </p:txBody>
+      </p:sp>
+      <p:sp>
+        <p:nvSpPr>
+          <p:cNvPr id="324" name="Shape 324"/>
+          <p:cNvSpPr/>
+          <p:nvPr/>
+        </p:nvSpPr>
+        <p:spPr>
+          <a:xfrm>
+            <a:off x="658368" y="4078224"/>
+            <a:ext cx="731520" cy="41148"/>
+          </a:xfrm>
+          <a:prstGeom prst="roundRect">
+            <a:avLst>
+              <a:gd name="adj" fmla="val 50000"/>
+            </a:avLst>
+          </a:prstGeom>
+          <a:solidFill>
+            <a:srgbClr val="D5DBE3"/>
+          </a:solidFill>
+          <a:ln>
+            <a:noFill/>
+          </a:ln>
+        </p:spPr>
+        <p:txBody>
+          <a:bodyPr wrap="square" lIns="36576" tIns="36576" rIns="36576" bIns="36576" anchor="t" rtlCol="0">
+            <a:noAutofit/>
+          </a:bodyPr>
+          <a:lstStyle/>
+          <a:p>
+            <a:pPr marL="0" indent="0" algn="l">
+              <a:spcBef>
+                <a:spcPts val="0"/>
+              </a:spcBef>
+              <a:buNone/>
+            </a:pPr>
+            <a:endParaRPr lang="en-GB" sz="800"/>
+          </a:p>
+        </p:txBody>
+      </p:sp>
+      <p:sp>
+        <p:nvSpPr>
+          <p:cNvPr id="325" name="Shape 325"/>
+          <p:cNvSpPr/>
+          <p:nvPr/>
+        </p:nvSpPr>
+        <p:spPr>
+          <a:xfrm>
+            <a:off x="1316736" y="1746504"/>
+            <a:ext cx="182880" cy="182880"/>
+          </a:xfrm>
+          <a:prstGeom prst="ellipse">
+            <a:avLst/>
+          </a:prstGeom>
+          <a:solidFill>
+            <a:srgbClr val="334155"/>
+          </a:solidFill>
+          <a:ln>
+            <a:noFill/>
+          </a:ln>
+        </p:spPr>
+        <p:txBody>
+          <a:bodyPr wrap="square" lIns="0" tIns="0" rIns="0" bIns="0" anchor="ctr" rtlCol="0">
+            <a:noAutofit/>
+          </a:bodyPr>
+          <a:lstStyle/>
+          <a:p>
+            <a:pPr marL="0" indent="0" algn="ctr">
+              <a:spcBef>
+                <a:spcPts val="0"/>
+              </a:spcBef>
+              <a:buNone/>
+            </a:pPr>
+            <a:r>
+              <a:rPr lang="en-GB" sz="800" dirty="0">
+                <a:solidFill>
+                  <a:srgbClr val="FFFFFF"/>
+                </a:solidFill>
+                <a:latin typeface="Google Sans Flex"/>
+                <a:ea typeface="Google Sans Flex"/>
+                <a:cs typeface="Google Sans Flex"/>
+                <a:sym typeface="Google Sans Flex"/>
+              </a:rPr>
+              <a:t>1</a:t>
+            </a:r>
+            <a:endParaRPr lang="en-GB" sz="800"/>
+          </a:p>
+        </p:txBody>
+      </p:sp>
+      <p:sp>
+        <p:nvSpPr>
+          <p:cNvPr id="326" name="Shape 326"/>
+          <p:cNvSpPr/>
+          <p:nvPr/>
+        </p:nvSpPr>
+        <p:spPr>
+          <a:xfrm>
+            <a:off x="1554480" y="1709928"/>
+            <a:ext cx="2331720" cy="2843784"/>
+          </a:xfrm>
+          <a:prstGeom prst="rect">
+            <a:avLst/>
+          </a:prstGeom>
+          <a:noFill/>
+          <a:ln w="8900">
+            <a:solidFill>
+              <a:srgbClr val="91A3B8"/>
+            </a:solidFill>
+            <a:prstDash val="solid"/>
+          </a:ln>
+        </p:spPr>
+        <p:txBody>
+          <a:bodyPr wrap="square" lIns="36576" tIns="36576" rIns="36576" bIns="36576" anchor="t" rtlCol="0">
+            <a:noAutofit/>
+          </a:bodyPr>
+          <a:lstStyle/>
+          <a:p>
+            <a:pPr marL="0" indent="0" algn="l">
+              <a:spcBef>
+                <a:spcPts val="0"/>
+              </a:spcBef>
+              <a:buNone/>
+            </a:pPr>
+            <a:endParaRPr lang="en-GB" sz="800"/>
+          </a:p>
+        </p:txBody>
+      </p:sp>
+      <p:sp>
+        <p:nvSpPr>
+          <p:cNvPr id="327" name="Shape 327"/>
+          <p:cNvSpPr txBox="1"/>
+          <p:nvPr/>
+        </p:nvSpPr>
+        <p:spPr>
+          <a:xfrm>
+            <a:off x="1645920" y="1764792"/>
+            <a:ext cx="1828800" cy="164592"/>
+          </a:xfrm>
+          <a:prstGeom prst="roundRect">
+            <a:avLst>
+              <a:gd name="adj" fmla="val 10000"/>
+            </a:avLst>
+          </a:prstGeom>
+          <a:noFill/>
+          <a:ln>
+            <a:noFill/>
+          </a:ln>
+        </p:spPr>
+        <p:txBody>
+          <a:bodyPr wrap="square" lIns="0" tIns="0" rIns="0" bIns="0" anchor="t" rtlCol="0">
+            <a:noAutofit/>
+          </a:bodyPr>
+          <a:lstStyle/>
+          <a:p>
+            <a:pPr marL="0" indent="0" algn="l">
+              <a:spcBef>
+                <a:spcPts val="0"/>
+              </a:spcBef>
+              <a:buNone/>
+            </a:pPr>
+            <a:r>
+              <a:rPr lang="en-GB" sz="750" dirty="0">
+                <a:solidFill>
+                  <a:srgbClr val="1F2937"/>
+                </a:solidFill>
+                <a:latin typeface="Google Sans Flex Medium"/>
+                <a:ea typeface="Google Sans Flex Medium"/>
+                <a:cs typeface="Google Sans Flex Medium"/>
+                <a:sym typeface="Google Sans Flex Medium"/>
+              </a:rPr>
+              <a:t>Mark Dizon</a:t>
+            </a:r>
+            <a:endParaRPr lang="en-GB" sz="750"/>
+          </a:p>
+        </p:txBody>
+      </p:sp>
+      <p:sp>
+        <p:nvSpPr>
+          <p:cNvPr id="328" name="Shape 328"/>
+          <p:cNvSpPr/>
+          <p:nvPr/>
+        </p:nvSpPr>
+        <p:spPr>
+          <a:xfrm>
+            <a:off x="1645920" y="2002536"/>
+            <a:ext cx="1600200" cy="182880"/>
+          </a:xfrm>
+          <a:prstGeom prst="roundRect">
+            <a:avLst>
+              <a:gd name="adj" fmla="val 40000"/>
+            </a:avLst>
+          </a:prstGeom>
+          <a:solidFill>
+            <a:srgbClr val="F1F3F5"/>
+          </a:solidFill>
+          <a:ln>
+            <a:noFill/>
+          </a:ln>
+        </p:spPr>
+        <p:txBody>
+          <a:bodyPr wrap="square" lIns="45720" tIns="45720" rIns="45720" bIns="45720" anchor="ctr" rtlCol="0">
+            <a:noAutofit/>
+          </a:bodyPr>
+          <a:lstStyle/>
+          <a:p>
+            <a:pPr marL="0" indent="0" algn="l">
+              <a:spcBef>
+                <a:spcPts val="0"/>
+              </a:spcBef>
+              <a:buNone/>
+            </a:pPr>
+            <a:r>
+              <a:rPr lang="en-GB" sz="600" dirty="0">
+                <a:solidFill>
+                  <a:srgbClr val="1F2937"/>
+                </a:solidFill>
+                <a:latin typeface="Google Sans Flex"/>
+                <a:ea typeface="Google Sans Flex"/>
+                <a:cs typeface="Google Sans Flex"/>
+                <a:sym typeface="Google Sans Flex"/>
+              </a:rPr>
+              <a:t>Hi! 2 tote bags please, black and cream</a:t>
+            </a:r>
+            <a:endParaRPr lang="en-GB" sz="600"/>
+          </a:p>
+        </p:txBody>
+      </p:sp>
+      <p:sp>
+        <p:nvSpPr>
+          <p:cNvPr id="329" name="Shape 329"/>
+          <p:cNvSpPr/>
+          <p:nvPr/>
+        </p:nvSpPr>
+        <p:spPr>
+          <a:xfrm>
+            <a:off x="2331720" y="2249424"/>
+            <a:ext cx="1463040" cy="182880"/>
+          </a:xfrm>
+          <a:prstGeom prst="roundRect">
+            <a:avLst>
+              <a:gd name="adj" fmla="val 40000"/>
+            </a:avLst>
+          </a:prstGeom>
+          <a:solidFill>
+            <a:srgbClr val="D7ECEA"/>
+          </a:solidFill>
+          <a:ln>
+            <a:noFill/>
+          </a:ln>
+        </p:spPr>
+        <p:txBody>
+          <a:bodyPr wrap="square" lIns="45720" tIns="45720" rIns="45720" bIns="45720" anchor="ctr" rtlCol="0">
+            <a:noAutofit/>
+          </a:bodyPr>
+          <a:lstStyle/>
+          <a:p>
+            <a:pPr marL="0" indent="0" algn="l">
+              <a:spcBef>
+                <a:spcPts val="0"/>
+              </a:spcBef>
+              <a:buNone/>
+            </a:pPr>
+            <a:r>
+              <a:rPr lang="en-GB" sz="600" dirty="0">
+                <a:solidFill>
+                  <a:srgbClr val="1F2937"/>
+                </a:solidFill>
+                <a:latin typeface="Google Sans Flex"/>
+                <a:ea typeface="Google Sans Flex"/>
+                <a:cs typeface="Google Sans Flex"/>
+                <a:sym typeface="Google Sans Flex"/>
+              </a:rPr>
+              <a:t>₱500 total. Payment is by GCash.</a:t>
+            </a:r>
+            <a:endParaRPr lang="en-GB" sz="600"/>
+          </a:p>
+        </p:txBody>
+      </p:sp>
+      <p:sp>
+        <p:nvSpPr>
+          <p:cNvPr id="330" name="Shape 330"/>
+          <p:cNvSpPr/>
+          <p:nvPr/>
+        </p:nvSpPr>
+        <p:spPr>
+          <a:xfrm>
+            <a:off x="1645920" y="2496312"/>
+            <a:ext cx="1691640" cy="182880"/>
+          </a:xfrm>
+          <a:prstGeom prst="roundRect">
+            <a:avLst>
+              <a:gd name="adj" fmla="val 40000"/>
+            </a:avLst>
+          </a:prstGeom>
+          <a:solidFill>
+            <a:srgbClr val="F1F3F5"/>
+          </a:solidFill>
+          <a:ln>
+            <a:noFill/>
+          </a:ln>
+        </p:spPr>
+        <p:txBody>
+          <a:bodyPr wrap="square" lIns="45720" tIns="45720" rIns="45720" bIns="45720" anchor="ctr" rtlCol="0">
+            <a:noAutofit/>
+          </a:bodyPr>
+          <a:lstStyle/>
+          <a:p>
+            <a:pPr marL="0" indent="0" algn="l">
+              <a:spcBef>
+                <a:spcPts val="0"/>
+              </a:spcBef>
+              <a:buNone/>
+            </a:pPr>
+            <a:r>
+              <a:rPr lang="en-GB" sz="600" dirty="0">
+                <a:solidFill>
+                  <a:srgbClr val="1F2937"/>
+                </a:solidFill>
+                <a:latin typeface="Google Sans Flex"/>
+                <a:ea typeface="Google Sans Flex"/>
+                <a:cs typeface="Google Sans Flex"/>
+                <a:sym typeface="Google Sans Flex"/>
+              </a:rPr>
+              <a:t>Already paid via GCash. Please ship today!</a:t>
+            </a:r>
+            <a:endParaRPr lang="en-GB" sz="600"/>
+          </a:p>
+        </p:txBody>
+      </p:sp>
+      <p:sp>
+        <p:nvSpPr>
+          <p:cNvPr id="331" name="Shape 331"/>
+          <p:cNvSpPr/>
+          <p:nvPr/>
+        </p:nvSpPr>
+        <p:spPr>
+          <a:xfrm>
+            <a:off x="2377440" y="2743200"/>
+            <a:ext cx="1417320" cy="182880"/>
+          </a:xfrm>
+          <a:prstGeom prst="roundRect">
+            <a:avLst>
+              <a:gd name="adj" fmla="val 40000"/>
+            </a:avLst>
+          </a:prstGeom>
+          <a:solidFill>
+            <a:srgbClr val="D7ECEA"/>
+          </a:solidFill>
+          <a:ln>
+            <a:noFill/>
+          </a:ln>
+        </p:spPr>
+        <p:txBody>
+          <a:bodyPr wrap="square" lIns="45720" tIns="45720" rIns="45720" bIns="45720" anchor="ctr" rtlCol="0">
+            <a:noAutofit/>
+          </a:bodyPr>
+          <a:lstStyle/>
+          <a:p>
+            <a:pPr marL="0" indent="0" algn="l">
+              <a:spcBef>
+                <a:spcPts val="0"/>
+              </a:spcBef>
+              <a:buNone/>
+            </a:pPr>
+            <a:r>
+              <a:rPr lang="en-GB" sz="600" dirty="0">
+                <a:solidFill>
+                  <a:srgbClr val="1F2937"/>
+                </a:solidFill>
+                <a:latin typeface="Google Sans Flex"/>
+                <a:ea typeface="Google Sans Flex"/>
+                <a:cs typeface="Google Sans Flex"/>
+                <a:sym typeface="Google Sans Flex"/>
+              </a:rPr>
+              <a:t>Here is your order … tap Confirm</a:t>
+            </a:r>
+            <a:endParaRPr lang="en-GB" sz="600"/>
+          </a:p>
+        </p:txBody>
+      </p:sp>
+      <p:sp>
+        <p:nvSpPr>
+          <p:cNvPr id="332" name="Shape 332"/>
+          <p:cNvSpPr/>
+          <p:nvPr/>
+        </p:nvSpPr>
+        <p:spPr>
+          <a:xfrm>
+            <a:off x="1645920" y="2990088"/>
+            <a:ext cx="914400" cy="182880"/>
+          </a:xfrm>
+          <a:prstGeom prst="roundRect">
+            <a:avLst>
+              <a:gd name="adj" fmla="val 40000"/>
+            </a:avLst>
+          </a:prstGeom>
+          <a:solidFill>
+            <a:srgbClr val="F1F3F5"/>
+          </a:solidFill>
+          <a:ln>
+            <a:noFill/>
+          </a:ln>
+        </p:spPr>
+        <p:txBody>
+          <a:bodyPr wrap="square" lIns="45720" tIns="45720" rIns="45720" bIns="45720" anchor="ctr" rtlCol="0">
+            <a:noAutofit/>
+          </a:bodyPr>
+          <a:lstStyle/>
+          <a:p>
+            <a:pPr marL="0" indent="0" algn="l">
+              <a:spcBef>
+                <a:spcPts val="0"/>
+              </a:spcBef>
+              <a:buNone/>
+            </a:pPr>
+            <a:r>
+              <a:rPr lang="en-GB" sz="600" dirty="0">
+                <a:solidFill>
+                  <a:srgbClr val="1F2937"/>
+                </a:solidFill>
+                <a:latin typeface="Google Sans Flex"/>
+                <a:ea typeface="Google Sans Flex"/>
+                <a:cs typeface="Google Sans Flex"/>
+                <a:sym typeface="Google Sans Flex"/>
+              </a:rPr>
+              <a:t>Confirm #UYKSM v1</a:t>
+            </a:r>
+            <a:endParaRPr lang="en-GB" sz="600"/>
+          </a:p>
+        </p:txBody>
+      </p:sp>
+      <p:sp>
+        <p:nvSpPr>
+          <p:cNvPr id="333" name="Shape 333"/>
+          <p:cNvSpPr/>
+          <p:nvPr/>
+        </p:nvSpPr>
+        <p:spPr>
+          <a:xfrm>
+            <a:off x="1645920" y="3236976"/>
+            <a:ext cx="566928" cy="457200"/>
+          </a:xfrm>
+          <a:prstGeom prst="rect">
+            <a:avLst/>
+          </a:prstGeom>
+          <a:solidFill>
+            <a:srgbClr val="F1F3F5"/>
+          </a:solidFill>
+          <a:ln w="8900">
+            <a:solidFill>
+              <a:srgbClr val="91A3B8"/>
+            </a:solidFill>
+            <a:prstDash val="dash"/>
+          </a:ln>
+        </p:spPr>
+        <p:txBody>
+          <a:bodyPr wrap="square" lIns="36576" tIns="36576" rIns="36576" bIns="36576" anchor="ctr" rtlCol="0">
+            <a:noAutofit/>
+          </a:bodyPr>
+          <a:lstStyle/>
+          <a:p>
+            <a:pPr marL="0" indent="0" algn="ctr">
+              <a:spcBef>
+                <a:spcPts val="0"/>
+              </a:spcBef>
+              <a:buNone/>
+            </a:pPr>
+            <a:r>
+              <a:rPr lang="en-GB" sz="600" dirty="0">
+                <a:solidFill>
+                  <a:srgbClr val="5B6678"/>
+                </a:solidFill>
+                <a:latin typeface="Google Sans Flex"/>
+                <a:ea typeface="Google Sans Flex"/>
+                <a:cs typeface="Google Sans Flex"/>
+                <a:sym typeface="Google Sans Flex"/>
+              </a:rPr>
+              <a:t>receipt</a:t>
+            </a:r>
+            <a:endParaRPr lang="en-GB" sz="600"/>
+          </a:p>
+        </p:txBody>
+      </p:sp>
+      <p:sp>
+        <p:nvSpPr>
+          <p:cNvPr id="334" name="Shape 334"/>
+          <p:cNvSpPr txBox="1"/>
+          <p:nvPr/>
+        </p:nvSpPr>
+        <p:spPr>
+          <a:xfrm>
+            <a:off x="2286000" y="3392424"/>
+            <a:ext cx="1463040" cy="164592"/>
+          </a:xfrm>
+          <a:prstGeom prst="roundRect">
+            <a:avLst>
+              <a:gd name="adj" fmla="val 10000"/>
+            </a:avLst>
+          </a:prstGeom>
+          <a:noFill/>
+          <a:ln>
+            <a:noFill/>
+          </a:ln>
+        </p:spPr>
+        <p:txBody>
+          <a:bodyPr wrap="square" lIns="0" tIns="0" rIns="0" bIns="0" anchor="t" rtlCol="0">
+            <a:noAutofit/>
+          </a:bodyPr>
+          <a:lstStyle/>
+          <a:p>
+            <a:pPr marL="0" indent="0" algn="l">
+              <a:spcBef>
+                <a:spcPts val="0"/>
+              </a:spcBef>
+              <a:buNone/>
+            </a:pPr>
+            <a:r>
+              <a:rPr lang="en-GB" sz="600" dirty="0">
+                <a:solidFill>
+                  <a:srgbClr val="5B6678"/>
+                </a:solidFill>
+                <a:latin typeface="Google Sans Flex"/>
+                <a:ea typeface="Google Sans Flex"/>
+                <a:cs typeface="Google Sans Flex"/>
+                <a:sym typeface="Google Sans Flex"/>
+              </a:rPr>
+              <a:t>Sent a photo: tap to check it</a:t>
+            </a:r>
+            <a:endParaRPr lang="en-GB" sz="600"/>
+          </a:p>
+        </p:txBody>
+      </p:sp>
+      <p:sp>
+        <p:nvSpPr>
+          <p:cNvPr id="335" name="Shape 335"/>
+          <p:cNvSpPr/>
+          <p:nvPr/>
+        </p:nvSpPr>
+        <p:spPr>
+          <a:xfrm>
+            <a:off x="1645920" y="4224528"/>
+            <a:ext cx="2148839" cy="256032"/>
+          </a:xfrm>
+          <a:prstGeom prst="roundRect">
+            <a:avLst>
+              <a:gd name="adj" fmla="val 12000"/>
+            </a:avLst>
+          </a:prstGeom>
+          <a:solidFill>
+            <a:srgbClr val="FFFFFF"/>
+          </a:solidFill>
+          <a:ln w="8900">
+            <a:solidFill>
+              <a:srgbClr val="91A3B8"/>
+            </a:solidFill>
+            <a:prstDash val="solid"/>
+          </a:ln>
+        </p:spPr>
+        <p:txBody>
+          <a:bodyPr wrap="square" lIns="64008" tIns="64008" rIns="64008" bIns="64008" anchor="ctr" rtlCol="0">
+            <a:noAutofit/>
+          </a:bodyPr>
+          <a:lstStyle/>
+          <a:p>
+            <a:pPr marL="0" indent="0" algn="l">
+              <a:spcBef>
+                <a:spcPts val="0"/>
+              </a:spcBef>
+              <a:buNone/>
+            </a:pPr>
+            <a:r>
+              <a:rPr lang="en-GB" sz="650" dirty="0">
+                <a:solidFill>
+                  <a:srgbClr val="5B6678"/>
+                </a:solidFill>
+                <a:latin typeface="Google Sans Flex"/>
+                <a:ea typeface="Google Sans Flex"/>
+                <a:cs typeface="Google Sans Flex"/>
+                <a:sym typeface="Google Sans Flex"/>
+              </a:rPr>
+              <a:t>Reply as the seller…</a:t>
+            </a:r>
+            <a:endParaRPr lang="en-GB" sz="650"/>
+          </a:p>
+        </p:txBody>
+      </p:sp>
+      <p:sp>
+        <p:nvSpPr>
+          <p:cNvPr id="336" name="Shape 336"/>
+          <p:cNvSpPr/>
+          <p:nvPr/>
+        </p:nvSpPr>
+        <p:spPr>
+          <a:xfrm>
+            <a:off x="3355848" y="4261104"/>
+            <a:ext cx="384048" cy="182880"/>
+          </a:xfrm>
+          <a:prstGeom prst="roundRect">
+            <a:avLst>
+              <a:gd name="adj" fmla="val 20000"/>
+            </a:avLst>
+          </a:prstGeom>
+          <a:solidFill>
+            <a:srgbClr val="0B6E66"/>
+          </a:solidFill>
+          <a:ln>
+            <a:noFill/>
+          </a:ln>
+        </p:spPr>
+        <p:txBody>
+          <a:bodyPr wrap="square" lIns="0" tIns="0" rIns="0" bIns="0" anchor="ctr" rtlCol="0">
+            <a:noAutofit/>
+          </a:bodyPr>
+          <a:lstStyle/>
+          <a:p>
+            <a:pPr marL="0" indent="0" algn="ctr">
+              <a:spcBef>
+                <a:spcPts val="0"/>
+              </a:spcBef>
+              <a:buNone/>
+            </a:pPr>
+            <a:r>
+              <a:rPr lang="en-GB" sz="650" dirty="0">
+                <a:solidFill>
+                  <a:srgbClr val="FFFFFF"/>
+                </a:solidFill>
+                <a:latin typeface="Google Sans Flex"/>
+                <a:ea typeface="Google Sans Flex"/>
+                <a:cs typeface="Google Sans Flex"/>
+                <a:sym typeface="Google Sans Flex"/>
+              </a:rPr>
+              <a:t>Send</a:t>
+            </a:r>
+            <a:endParaRPr lang="en-GB" sz="650"/>
+          </a:p>
+        </p:txBody>
+      </p:sp>
+      <p:sp>
+        <p:nvSpPr>
+          <p:cNvPr id="337" name="Shape 337"/>
+          <p:cNvSpPr/>
+          <p:nvPr/>
+        </p:nvSpPr>
+        <p:spPr>
+          <a:xfrm>
+            <a:off x="3611880" y="1746504"/>
+            <a:ext cx="182880" cy="182880"/>
+          </a:xfrm>
+          <a:prstGeom prst="ellipse">
+            <a:avLst/>
+          </a:prstGeom>
+          <a:solidFill>
+            <a:srgbClr val="334155"/>
+          </a:solidFill>
+          <a:ln>
+            <a:noFill/>
+          </a:ln>
+        </p:spPr>
+        <p:txBody>
+          <a:bodyPr wrap="square" lIns="0" tIns="0" rIns="0" bIns="0" anchor="ctr" rtlCol="0">
+            <a:noAutofit/>
+          </a:bodyPr>
+          <a:lstStyle/>
+          <a:p>
+            <a:pPr marL="0" indent="0" algn="ctr">
+              <a:spcBef>
+                <a:spcPts val="0"/>
+              </a:spcBef>
+              <a:buNone/>
+            </a:pPr>
+            <a:r>
+              <a:rPr lang="en-GB" sz="800" dirty="0">
+                <a:solidFill>
+                  <a:srgbClr val="FFFFFF"/>
+                </a:solidFill>
+                <a:latin typeface="Google Sans Flex"/>
+                <a:ea typeface="Google Sans Flex"/>
+                <a:cs typeface="Google Sans Flex"/>
+                <a:sym typeface="Google Sans Flex"/>
+              </a:rPr>
+              <a:t>2</a:t>
+            </a:r>
+            <a:endParaRPr lang="en-GB" sz="800"/>
+          </a:p>
+        </p:txBody>
+      </p:sp>
+      <p:sp>
+        <p:nvSpPr>
+          <p:cNvPr id="338" name="Shape 338"/>
+          <p:cNvSpPr/>
+          <p:nvPr/>
+        </p:nvSpPr>
+        <p:spPr>
+          <a:xfrm>
+            <a:off x="3886200" y="1709928"/>
+            <a:ext cx="1874519" cy="2843784"/>
+          </a:xfrm>
+          <a:prstGeom prst="rect">
+            <a:avLst/>
+          </a:prstGeom>
+          <a:noFill/>
+          <a:ln w="8900">
+            <a:solidFill>
+              <a:srgbClr val="91A3B8"/>
+            </a:solidFill>
+            <a:prstDash val="solid"/>
+          </a:ln>
+        </p:spPr>
+        <p:txBody>
+          <a:bodyPr wrap="square" lIns="36576" tIns="36576" rIns="36576" bIns="36576" anchor="t" rtlCol="0">
+            <a:noAutofit/>
+          </a:bodyPr>
+          <a:lstStyle/>
+          <a:p>
+            <a:pPr marL="0" indent="0" algn="l">
+              <a:spcBef>
+                <a:spcPts val="0"/>
+              </a:spcBef>
+              <a:buNone/>
+            </a:pPr>
+            <a:endParaRPr lang="en-GB" sz="800"/>
+          </a:p>
+        </p:txBody>
+      </p:sp>
+      <p:sp>
+        <p:nvSpPr>
+          <p:cNvPr id="339" name="Shape 339"/>
+          <p:cNvSpPr txBox="1"/>
+          <p:nvPr/>
+        </p:nvSpPr>
+        <p:spPr>
+          <a:xfrm>
+            <a:off x="3977639" y="1764792"/>
+            <a:ext cx="1691639" cy="164592"/>
+          </a:xfrm>
+          <a:prstGeom prst="roundRect">
+            <a:avLst>
+              <a:gd name="adj" fmla="val 10000"/>
+            </a:avLst>
+          </a:prstGeom>
+          <a:noFill/>
+          <a:ln>
+            <a:noFill/>
+          </a:ln>
+        </p:spPr>
+        <p:txBody>
+          <a:bodyPr wrap="square" lIns="0" tIns="0" rIns="0" bIns="0" anchor="t" rtlCol="0">
+            <a:noAutofit/>
+          </a:bodyPr>
+          <a:lstStyle/>
+          <a:p>
+            <a:pPr marL="0" indent="0" algn="l">
+              <a:spcBef>
+                <a:spcPts val="0"/>
+              </a:spcBef>
+              <a:buNone/>
+            </a:pPr>
+            <a:r>
+              <a:rPr lang="en-GB" sz="750" dirty="0">
+                <a:solidFill>
+                  <a:srgbClr val="1F2937"/>
+                </a:solidFill>
+                <a:latin typeface="Google Sans Flex Medium"/>
+                <a:ea typeface="Google Sans Flex Medium"/>
+                <a:cs typeface="Google Sans Flex Medium"/>
+                <a:sym typeface="Google Sans Flex Medium"/>
+              </a:rPr>
+              <a:t>AI brief</a:t>
+            </a:r>
+            <a:endParaRPr lang="en-GB" sz="750"/>
+          </a:p>
+        </p:txBody>
+      </p:sp>
+      <p:sp>
+        <p:nvSpPr>
+          <p:cNvPr id="340" name="Shape 340"/>
+          <p:cNvSpPr/>
+          <p:nvPr/>
+        </p:nvSpPr>
+        <p:spPr>
+          <a:xfrm>
+            <a:off x="3977639" y="1984248"/>
+            <a:ext cx="1691639" cy="41148"/>
+          </a:xfrm>
+          <a:prstGeom prst="roundRect">
+            <a:avLst>
+              <a:gd name="adj" fmla="val 50000"/>
+            </a:avLst>
+          </a:prstGeom>
+          <a:solidFill>
+            <a:srgbClr val="D5DBE3"/>
+          </a:solidFill>
+          <a:ln>
+            <a:noFill/>
+          </a:ln>
+        </p:spPr>
+        <p:txBody>
+          <a:bodyPr wrap="square" lIns="36576" tIns="36576" rIns="36576" bIns="36576" anchor="t" rtlCol="0">
+            <a:noAutofit/>
+          </a:bodyPr>
+          <a:lstStyle/>
+          <a:p>
+            <a:pPr marL="0" indent="0" algn="l">
+              <a:spcBef>
+                <a:spcPts val="0"/>
+              </a:spcBef>
+              <a:buNone/>
+            </a:pPr>
+            <a:endParaRPr lang="en-GB" sz="800"/>
+          </a:p>
+        </p:txBody>
+      </p:sp>
+      <p:sp>
+        <p:nvSpPr>
+          <p:cNvPr id="341" name="Shape 341"/>
+          <p:cNvSpPr/>
+          <p:nvPr/>
+        </p:nvSpPr>
+        <p:spPr>
+          <a:xfrm>
+            <a:off x="3977639" y="2066543"/>
+            <a:ext cx="1556308" cy="41148"/>
+          </a:xfrm>
+          <a:prstGeom prst="roundRect">
+            <a:avLst>
+              <a:gd name="adj" fmla="val 50000"/>
+            </a:avLst>
+          </a:prstGeom>
+          <a:solidFill>
+            <a:srgbClr val="D5DBE3"/>
+          </a:solidFill>
+          <a:ln>
+            <a:noFill/>
+          </a:ln>
+        </p:spPr>
+        <p:txBody>
+          <a:bodyPr wrap="square" lIns="36576" tIns="36576" rIns="36576" bIns="36576" anchor="t" rtlCol="0">
+            <a:noAutofit/>
+          </a:bodyPr>
+          <a:lstStyle/>
+          <a:p>
+            <a:pPr marL="0" indent="0" algn="l">
+              <a:spcBef>
+                <a:spcPts val="0"/>
+              </a:spcBef>
+              <a:buNone/>
+            </a:pPr>
+            <a:endParaRPr lang="en-GB" sz="800"/>
+          </a:p>
+        </p:txBody>
+      </p:sp>
+      <p:sp>
+        <p:nvSpPr>
+          <p:cNvPr id="342" name="Shape 342"/>
+          <p:cNvSpPr/>
+          <p:nvPr/>
+        </p:nvSpPr>
+        <p:spPr>
+          <a:xfrm>
+            <a:off x="3977639" y="2148840"/>
+            <a:ext cx="1640890" cy="41148"/>
+          </a:xfrm>
+          <a:prstGeom prst="roundRect">
+            <a:avLst>
+              <a:gd name="adj" fmla="val 50000"/>
+            </a:avLst>
+          </a:prstGeom>
+          <a:solidFill>
+            <a:srgbClr val="D5DBE3"/>
+          </a:solidFill>
+          <a:ln>
+            <a:noFill/>
+          </a:ln>
+        </p:spPr>
+        <p:txBody>
+          <a:bodyPr wrap="square" lIns="36576" tIns="36576" rIns="36576" bIns="36576" anchor="t" rtlCol="0">
+            <a:noAutofit/>
+          </a:bodyPr>
+          <a:lstStyle/>
+          <a:p>
+            <a:pPr marL="0" indent="0" algn="l">
+              <a:spcBef>
+                <a:spcPts val="0"/>
+              </a:spcBef>
+              <a:buNone/>
+            </a:pPr>
+            <a:endParaRPr lang="en-GB" sz="800"/>
+          </a:p>
+        </p:txBody>
+      </p:sp>
+      <p:sp>
+        <p:nvSpPr>
+          <p:cNvPr id="343" name="Shape 343"/>
+          <p:cNvSpPr/>
+          <p:nvPr/>
+        </p:nvSpPr>
+        <p:spPr>
+          <a:xfrm>
+            <a:off x="3977639" y="2231136"/>
+            <a:ext cx="1014983" cy="41148"/>
+          </a:xfrm>
+          <a:prstGeom prst="roundRect">
+            <a:avLst>
+              <a:gd name="adj" fmla="val 50000"/>
+            </a:avLst>
+          </a:prstGeom>
+          <a:solidFill>
+            <a:srgbClr val="D5DBE3"/>
+          </a:solidFill>
+          <a:ln>
+            <a:noFill/>
+          </a:ln>
+        </p:spPr>
+        <p:txBody>
+          <a:bodyPr wrap="square" lIns="36576" tIns="36576" rIns="36576" bIns="36576" anchor="t" rtlCol="0">
+            <a:noAutofit/>
+          </a:bodyPr>
+          <a:lstStyle/>
+          <a:p>
+            <a:pPr marL="0" indent="0" algn="l">
+              <a:spcBef>
+                <a:spcPts val="0"/>
+              </a:spcBef>
+              <a:buNone/>
+            </a:pPr>
+            <a:endParaRPr lang="en-GB" sz="800"/>
+          </a:p>
+        </p:txBody>
+      </p:sp>
+      <p:sp>
+        <p:nvSpPr>
+          <p:cNvPr id="344" name="Shape 344"/>
+          <p:cNvSpPr/>
+          <p:nvPr/>
+        </p:nvSpPr>
+        <p:spPr>
+          <a:xfrm>
+            <a:off x="3977639" y="2350008"/>
+            <a:ext cx="1691639" cy="310896"/>
+          </a:xfrm>
+          <a:prstGeom prst="roundRect">
+            <a:avLst>
+              <a:gd name="adj" fmla="val 12000"/>
+            </a:avLst>
+          </a:prstGeom>
+          <a:solidFill>
+            <a:srgbClr val="FDF1DF"/>
+          </a:solidFill>
+          <a:ln w="8900">
+            <a:solidFill>
+              <a:srgbClr val="D9A35B"/>
+            </a:solidFill>
+            <a:prstDash val="solid"/>
+          </a:ln>
+        </p:spPr>
+        <p:txBody>
+          <a:bodyPr wrap="square" lIns="45720" tIns="45720" rIns="45720" bIns="45720" anchor="ctr" rtlCol="0">
+            <a:noAutofit/>
+          </a:bodyPr>
+          <a:lstStyle/>
+          <a:p>
+            <a:pPr marL="0" indent="0" algn="l">
+              <a:spcBef>
+                <a:spcPts val="0"/>
+              </a:spcBef>
+              <a:buNone/>
+            </a:pPr>
+            <a:r>
+              <a:rPr lang="en-GB" sz="700" dirty="0">
+                <a:solidFill>
+                  <a:srgbClr val="9A5B13"/>
+                </a:solidFill>
+                <a:latin typeface="Google Sans Flex Medium"/>
+                <a:ea typeface="Google Sans Flex Medium"/>
+                <a:cs typeface="Google Sans Flex Medium"/>
+                <a:sym typeface="Google Sans Flex Medium"/>
+              </a:rPr>
+              <a:t>!  2 to verify before shipping</a:t>
+            </a:r>
+            <a:endParaRPr lang="en-GB" sz="700"/>
+          </a:p>
+          <a:p>
+            <a:pPr marL="0" indent="0" algn="l">
+              <a:spcBef>
+                <a:spcPts val="0"/>
+              </a:spcBef>
+              <a:buNone/>
+            </a:pPr>
+            <a:r>
+              <a:rPr lang="en-GB" sz="550" dirty="0">
+                <a:solidFill>
+                  <a:srgbClr val="5B6678"/>
+                </a:solidFill>
+                <a:latin typeface="Google Sans Flex"/>
+                <a:ea typeface="Google Sans Flex"/>
+                <a:cs typeface="Google Sans Flex"/>
+                <a:sym typeface="Google Sans Flex"/>
+              </a:rPr>
+              <a:t>From what was said in this chat</a:t>
+            </a:r>
+            <a:endParaRPr lang="en-GB" sz="550"/>
+          </a:p>
+        </p:txBody>
+      </p:sp>
+      <p:sp>
+        <p:nvSpPr>
+          <p:cNvPr id="345" name="Shape 345"/>
+          <p:cNvSpPr/>
+          <p:nvPr/>
+        </p:nvSpPr>
+        <p:spPr>
+          <a:xfrm>
+            <a:off x="5486400" y="1746504"/>
+            <a:ext cx="182880" cy="182880"/>
+          </a:xfrm>
+          <a:prstGeom prst="ellipse">
+            <a:avLst/>
+          </a:prstGeom>
+          <a:solidFill>
+            <a:srgbClr val="334155"/>
+          </a:solidFill>
+          <a:ln>
+            <a:noFill/>
+          </a:ln>
+        </p:spPr>
+        <p:txBody>
+          <a:bodyPr wrap="square" lIns="0" tIns="0" rIns="0" bIns="0" anchor="ctr" rtlCol="0">
+            <a:noAutofit/>
+          </a:bodyPr>
+          <a:lstStyle/>
+          <a:p>
+            <a:pPr marL="0" indent="0" algn="ctr">
+              <a:spcBef>
+                <a:spcPts val="0"/>
+              </a:spcBef>
+              <a:buNone/>
+            </a:pPr>
+            <a:r>
+              <a:rPr lang="en-GB" sz="800" dirty="0">
+                <a:solidFill>
+                  <a:srgbClr val="FFFFFF"/>
+                </a:solidFill>
+                <a:latin typeface="Google Sans Flex"/>
+                <a:ea typeface="Google Sans Flex"/>
+                <a:cs typeface="Google Sans Flex"/>
+                <a:sym typeface="Google Sans Flex"/>
+              </a:rPr>
+              <a:t>3</a:t>
+            </a:r>
+            <a:endParaRPr lang="en-GB" sz="800"/>
+          </a:p>
+        </p:txBody>
+      </p:sp>
+      <p:sp>
+        <p:nvSpPr>
+          <p:cNvPr id="346" name="Shape 346"/>
+          <p:cNvSpPr txBox="1"/>
+          <p:nvPr/>
+        </p:nvSpPr>
+        <p:spPr>
+          <a:xfrm>
+            <a:off x="3977639" y="2770632"/>
+            <a:ext cx="1691639" cy="164592"/>
+          </a:xfrm>
+          <a:prstGeom prst="roundRect">
+            <a:avLst>
+              <a:gd name="adj" fmla="val 10000"/>
+            </a:avLst>
+          </a:prstGeom>
+          <a:noFill/>
+          <a:ln>
+            <a:noFill/>
+          </a:ln>
+        </p:spPr>
+        <p:txBody>
+          <a:bodyPr wrap="square" lIns="0" tIns="0" rIns="0" bIns="0" anchor="t" rtlCol="0">
+            <a:noAutofit/>
+          </a:bodyPr>
+          <a:lstStyle/>
+          <a:p>
+            <a:pPr marL="0" indent="0" algn="l">
+              <a:spcBef>
+                <a:spcPts val="0"/>
+              </a:spcBef>
+              <a:buNone/>
+            </a:pPr>
+            <a:r>
+              <a:rPr lang="en-GB" sz="700" dirty="0">
+                <a:solidFill>
+                  <a:srgbClr val="1F2937"/>
+                </a:solidFill>
+                <a:latin typeface="Google Sans Flex Medium"/>
+                <a:ea typeface="Google Sans Flex Medium"/>
+                <a:cs typeface="Google Sans Flex Medium"/>
+                <a:sym typeface="Google Sans Flex Medium"/>
+              </a:rPr>
+              <a:t>Order #UYKSM · Confirmed</a:t>
+            </a:r>
+            <a:endParaRPr lang="en-GB" sz="700"/>
+          </a:p>
+        </p:txBody>
+      </p:sp>
+      <p:sp>
+        <p:nvSpPr>
+          <p:cNvPr id="347" name="Shape 347"/>
+          <p:cNvSpPr txBox="1"/>
+          <p:nvPr/>
+        </p:nvSpPr>
+        <p:spPr>
+          <a:xfrm>
+            <a:off x="3977639" y="2990088"/>
+            <a:ext cx="109728" cy="146304"/>
+          </a:xfrm>
+          <a:prstGeom prst="roundRect">
+            <a:avLst>
+              <a:gd name="adj" fmla="val 10000"/>
+            </a:avLst>
+          </a:prstGeom>
+          <a:noFill/>
+          <a:ln>
+            <a:noFill/>
+          </a:ln>
+        </p:spPr>
+        <p:txBody>
+          <a:bodyPr wrap="square" lIns="0" tIns="0" rIns="0" bIns="0" anchor="t" rtlCol="0">
+            <a:noAutofit/>
+          </a:bodyPr>
+          <a:lstStyle/>
+          <a:p>
+            <a:pPr marL="0" indent="0" algn="l">
+              <a:spcBef>
+                <a:spcPts val="0"/>
+              </a:spcBef>
+              <a:buNone/>
+            </a:pPr>
+            <a:r>
+              <a:rPr lang="en-GB" sz="700" dirty="0">
+                <a:solidFill>
+                  <a:srgbClr val="0B6E66"/>
+                </a:solidFill>
+                <a:latin typeface="Google Sans Flex Medium"/>
+                <a:ea typeface="Google Sans Flex Medium"/>
+                <a:cs typeface="Google Sans Flex Medium"/>
+                <a:sym typeface="Google Sans Flex Medium"/>
+              </a:rPr>
+              <a:t>✓</a:t>
+            </a:r>
+            <a:endParaRPr lang="en-GB" sz="700"/>
+          </a:p>
+        </p:txBody>
+      </p:sp>
+      <p:sp>
+        <p:nvSpPr>
+          <p:cNvPr id="348" name="Shape 348"/>
+          <p:cNvSpPr txBox="1"/>
+          <p:nvPr/>
+        </p:nvSpPr>
+        <p:spPr>
+          <a:xfrm>
+            <a:off x="4096511" y="2990088"/>
+            <a:ext cx="548640" cy="146304"/>
+          </a:xfrm>
+          <a:prstGeom prst="roundRect">
+            <a:avLst>
+              <a:gd name="adj" fmla="val 10000"/>
+            </a:avLst>
+          </a:prstGeom>
+          <a:noFill/>
+          <a:ln>
+            <a:noFill/>
+          </a:ln>
+        </p:spPr>
+        <p:txBody>
+          <a:bodyPr wrap="square" lIns="0" tIns="0" rIns="0" bIns="0" anchor="t" rtlCol="0">
+            <a:noAutofit/>
+          </a:bodyPr>
+          <a:lstStyle/>
+          <a:p>
+            <a:pPr marL="0" indent="0" algn="l">
+              <a:spcBef>
+                <a:spcPts val="0"/>
+              </a:spcBef>
+              <a:buNone/>
+            </a:pPr>
+            <a:r>
+              <a:rPr lang="en-GB" sz="650" dirty="0">
+                <a:solidFill>
+                  <a:srgbClr val="1F2937"/>
+                </a:solidFill>
+                <a:latin typeface="Google Sans Flex Medium"/>
+                <a:ea typeface="Google Sans Flex Medium"/>
+                <a:cs typeface="Google Sans Flex Medium"/>
+                <a:sym typeface="Google Sans Flex Medium"/>
+              </a:rPr>
+              <a:t>Confirmed</a:t>
+            </a:r>
+            <a:endParaRPr lang="en-GB" sz="650"/>
+          </a:p>
+        </p:txBody>
+      </p:sp>
+      <p:sp>
+        <p:nvSpPr>
+          <p:cNvPr id="349" name="Shape 349"/>
+          <p:cNvSpPr txBox="1"/>
+          <p:nvPr/>
+        </p:nvSpPr>
+        <p:spPr>
+          <a:xfrm>
+            <a:off x="4636007" y="2990088"/>
+            <a:ext cx="1033271" cy="146304"/>
+          </a:xfrm>
+          <a:prstGeom prst="roundRect">
+            <a:avLst>
+              <a:gd name="adj" fmla="val 10000"/>
+            </a:avLst>
+          </a:prstGeom>
+          <a:noFill/>
+          <a:ln>
+            <a:noFill/>
+          </a:ln>
+        </p:spPr>
+        <p:txBody>
+          <a:bodyPr wrap="square" lIns="0" tIns="0" rIns="0" bIns="0" anchor="t" rtlCol="0">
+            <a:noAutofit/>
+          </a:bodyPr>
+          <a:lstStyle/>
+          <a:p>
+            <a:pPr marL="0" indent="0" algn="l">
+              <a:spcBef>
+                <a:spcPts val="0"/>
+              </a:spcBef>
+              <a:buNone/>
+            </a:pPr>
+            <a:r>
+              <a:rPr lang="en-GB" sz="600" dirty="0">
+                <a:solidFill>
+                  <a:srgbClr val="5B6678"/>
+                </a:solidFill>
+                <a:latin typeface="Google Sans Flex"/>
+                <a:ea typeface="Google Sans Flex"/>
+                <a:cs typeface="Google Sans Flex"/>
+                <a:sym typeface="Google Sans Flex"/>
+              </a:rPr>
+              <a:t>By the customer</a:t>
+            </a:r>
+            <a:endParaRPr lang="en-GB" sz="600"/>
+          </a:p>
+        </p:txBody>
+      </p:sp>
+      <p:sp>
+        <p:nvSpPr>
+          <p:cNvPr id="350" name="Shape 350"/>
+          <p:cNvSpPr txBox="1"/>
+          <p:nvPr/>
+        </p:nvSpPr>
+        <p:spPr>
+          <a:xfrm>
+            <a:off x="3977639" y="3163824"/>
+            <a:ext cx="109728" cy="146304"/>
+          </a:xfrm>
+          <a:prstGeom prst="roundRect">
+            <a:avLst>
+              <a:gd name="adj" fmla="val 10000"/>
+            </a:avLst>
+          </a:prstGeom>
+          <a:noFill/>
+          <a:ln>
+            <a:noFill/>
+          </a:ln>
+        </p:spPr>
+        <p:txBody>
+          <a:bodyPr wrap="square" lIns="0" tIns="0" rIns="0" bIns="0" anchor="t" rtlCol="0">
+            <a:noAutofit/>
+          </a:bodyPr>
+          <a:lstStyle/>
+          <a:p>
+            <a:pPr marL="0" indent="0" algn="l">
+              <a:spcBef>
+                <a:spcPts val="0"/>
+              </a:spcBef>
+              <a:buNone/>
+            </a:pPr>
+            <a:r>
+              <a:rPr lang="en-GB" sz="700" dirty="0">
+                <a:solidFill>
+                  <a:srgbClr val="B45309"/>
+                </a:solidFill>
+                <a:latin typeface="Google Sans Flex Medium"/>
+                <a:ea typeface="Google Sans Flex Medium"/>
+                <a:cs typeface="Google Sans Flex Medium"/>
+                <a:sym typeface="Google Sans Flex Medium"/>
+              </a:rPr>
+              <a:t>!</a:t>
+            </a:r>
+            <a:endParaRPr lang="en-GB" sz="700"/>
+          </a:p>
+        </p:txBody>
+      </p:sp>
+      <p:sp>
+        <p:nvSpPr>
+          <p:cNvPr id="351" name="Shape 351"/>
+          <p:cNvSpPr txBox="1"/>
+          <p:nvPr/>
+        </p:nvSpPr>
+        <p:spPr>
+          <a:xfrm>
+            <a:off x="4096511" y="3163824"/>
+            <a:ext cx="548640" cy="146304"/>
+          </a:xfrm>
+          <a:prstGeom prst="roundRect">
+            <a:avLst>
+              <a:gd name="adj" fmla="val 10000"/>
+            </a:avLst>
+          </a:prstGeom>
+          <a:noFill/>
+          <a:ln>
+            <a:noFill/>
+          </a:ln>
+        </p:spPr>
+        <p:txBody>
+          <a:bodyPr wrap="square" lIns="0" tIns="0" rIns="0" bIns="0" anchor="t" rtlCol="0">
+            <a:noAutofit/>
+          </a:bodyPr>
+          <a:lstStyle/>
+          <a:p>
+            <a:pPr marL="0" indent="0" algn="l">
+              <a:spcBef>
+                <a:spcPts val="0"/>
+              </a:spcBef>
+              <a:buNone/>
+            </a:pPr>
+            <a:r>
+              <a:rPr lang="en-GB" sz="650" dirty="0">
+                <a:solidFill>
+                  <a:srgbClr val="1F2937"/>
+                </a:solidFill>
+                <a:latin typeface="Google Sans Flex Medium"/>
+                <a:ea typeface="Google Sans Flex Medium"/>
+                <a:cs typeface="Google Sans Flex Medium"/>
+                <a:sym typeface="Google Sans Flex Medium"/>
+              </a:rPr>
+              <a:t>Payment</a:t>
+            </a:r>
+            <a:endParaRPr lang="en-GB" sz="650"/>
+          </a:p>
+        </p:txBody>
+      </p:sp>
+      <p:sp>
+        <p:nvSpPr>
+          <p:cNvPr id="352" name="Shape 352"/>
+          <p:cNvSpPr txBox="1"/>
+          <p:nvPr/>
+        </p:nvSpPr>
+        <p:spPr>
+          <a:xfrm>
+            <a:off x="4636007" y="3163824"/>
+            <a:ext cx="1033271" cy="146304"/>
+          </a:xfrm>
+          <a:prstGeom prst="roundRect">
+            <a:avLst>
+              <a:gd name="adj" fmla="val 10000"/>
+            </a:avLst>
+          </a:prstGeom>
+          <a:noFill/>
+          <a:ln>
+            <a:noFill/>
+          </a:ln>
+        </p:spPr>
+        <p:txBody>
+          <a:bodyPr wrap="square" lIns="0" tIns="0" rIns="0" bIns="0" anchor="t" rtlCol="0">
+            <a:noAutofit/>
+          </a:bodyPr>
+          <a:lstStyle/>
+          <a:p>
+            <a:pPr marL="0" indent="0" algn="l">
+              <a:spcBef>
+                <a:spcPts val="0"/>
+              </a:spcBef>
+              <a:buNone/>
+            </a:pPr>
+            <a:r>
+              <a:rPr lang="en-GB" sz="600" dirty="0">
+                <a:solidFill>
+                  <a:srgbClr val="B45309"/>
+                </a:solidFill>
+                <a:latin typeface="Google Sans Flex"/>
+                <a:ea typeface="Google Sans Flex"/>
+                <a:cs typeface="Google Sans Flex"/>
+                <a:sym typeface="Google Sans Flex"/>
+              </a:rPr>
+              <a:t>Says they paid: not verified</a:t>
+            </a:r>
+            <a:endParaRPr lang="en-GB" sz="600"/>
+          </a:p>
+        </p:txBody>
+      </p:sp>
+      <p:sp>
+        <p:nvSpPr>
+          <p:cNvPr id="353" name="Shape 353"/>
+          <p:cNvSpPr txBox="1"/>
+          <p:nvPr/>
+        </p:nvSpPr>
+        <p:spPr>
+          <a:xfrm>
+            <a:off x="3977639" y="3337560"/>
+            <a:ext cx="109728" cy="146304"/>
+          </a:xfrm>
+          <a:prstGeom prst="roundRect">
+            <a:avLst>
+              <a:gd name="adj" fmla="val 10000"/>
+            </a:avLst>
+          </a:prstGeom>
+          <a:noFill/>
+          <a:ln>
+            <a:noFill/>
+          </a:ln>
+        </p:spPr>
+        <p:txBody>
+          <a:bodyPr wrap="square" lIns="0" tIns="0" rIns="0" bIns="0" anchor="t" rtlCol="0">
+            <a:noAutofit/>
+          </a:bodyPr>
+          <a:lstStyle/>
+          <a:p>
+            <a:pPr marL="0" indent="0" algn="l">
+              <a:spcBef>
+                <a:spcPts val="0"/>
+              </a:spcBef>
+              <a:buNone/>
+            </a:pPr>
+            <a:r>
+              <a:rPr lang="en-GB" sz="700" dirty="0">
+                <a:solidFill>
+                  <a:srgbClr val="5B6678"/>
+                </a:solidFill>
+                <a:latin typeface="Google Sans Flex Medium"/>
+                <a:ea typeface="Google Sans Flex Medium"/>
+                <a:cs typeface="Google Sans Flex Medium"/>
+                <a:sym typeface="Google Sans Flex Medium"/>
+              </a:rPr>
+              <a:t>·</a:t>
+            </a:r>
+            <a:endParaRPr lang="en-GB" sz="700"/>
+          </a:p>
+        </p:txBody>
+      </p:sp>
+      <p:sp>
+        <p:nvSpPr>
+          <p:cNvPr id="354" name="Shape 354"/>
+          <p:cNvSpPr txBox="1"/>
+          <p:nvPr/>
+        </p:nvSpPr>
+        <p:spPr>
+          <a:xfrm>
+            <a:off x="4096511" y="3337560"/>
+            <a:ext cx="548640" cy="146304"/>
+          </a:xfrm>
+          <a:prstGeom prst="roundRect">
+            <a:avLst>
+              <a:gd name="adj" fmla="val 10000"/>
+            </a:avLst>
+          </a:prstGeom>
+          <a:noFill/>
+          <a:ln>
+            <a:noFill/>
+          </a:ln>
+        </p:spPr>
+        <p:txBody>
+          <a:bodyPr wrap="square" lIns="0" tIns="0" rIns="0" bIns="0" anchor="t" rtlCol="0">
+            <a:noAutofit/>
+          </a:bodyPr>
+          <a:lstStyle/>
+          <a:p>
+            <a:pPr marL="0" indent="0" algn="l">
+              <a:spcBef>
+                <a:spcPts val="0"/>
+              </a:spcBef>
+              <a:buNone/>
+            </a:pPr>
+            <a:r>
+              <a:rPr lang="en-GB" sz="650" dirty="0">
+                <a:solidFill>
+                  <a:srgbClr val="1F2937"/>
+                </a:solidFill>
+                <a:latin typeface="Google Sans Flex Medium"/>
+                <a:ea typeface="Google Sans Flex Medium"/>
+                <a:cs typeface="Google Sans Flex Medium"/>
+                <a:sym typeface="Google Sans Flex Medium"/>
+              </a:rPr>
+              <a:t>Packing</a:t>
+            </a:r>
+            <a:endParaRPr lang="en-GB" sz="650"/>
+          </a:p>
+        </p:txBody>
+      </p:sp>
+      <p:sp>
+        <p:nvSpPr>
+          <p:cNvPr id="355" name="Shape 355"/>
+          <p:cNvSpPr txBox="1"/>
+          <p:nvPr/>
+        </p:nvSpPr>
+        <p:spPr>
+          <a:xfrm>
+            <a:off x="4636007" y="3337560"/>
+            <a:ext cx="1033271" cy="146304"/>
+          </a:xfrm>
+          <a:prstGeom prst="roundRect">
+            <a:avLst>
+              <a:gd name="adj" fmla="val 10000"/>
+            </a:avLst>
+          </a:prstGeom>
+          <a:noFill/>
+          <a:ln>
+            <a:noFill/>
+          </a:ln>
+        </p:spPr>
+        <p:txBody>
+          <a:bodyPr wrap="square" lIns="0" tIns="0" rIns="0" bIns="0" anchor="t" rtlCol="0">
+            <a:noAutofit/>
+          </a:bodyPr>
+          <a:lstStyle/>
+          <a:p>
+            <a:pPr marL="0" indent="0" algn="l">
+              <a:spcBef>
+                <a:spcPts val="0"/>
+              </a:spcBef>
+              <a:buNone/>
+            </a:pPr>
+            <a:r>
+              <a:rPr lang="en-GB" sz="600" dirty="0">
+                <a:solidFill>
+                  <a:srgbClr val="5B6678"/>
+                </a:solidFill>
+                <a:latin typeface="Google Sans Flex"/>
+                <a:ea typeface="Google Sans Flex"/>
+                <a:cs typeface="Google Sans Flex"/>
+                <a:sym typeface="Google Sans Flex"/>
+              </a:rPr>
+              <a:t>Waits for payment</a:t>
+            </a:r>
+            <a:endParaRPr lang="en-GB" sz="600"/>
+          </a:p>
+        </p:txBody>
+      </p:sp>
+      <p:sp>
+        <p:nvSpPr>
+          <p:cNvPr id="356" name="Shape 356"/>
+          <p:cNvSpPr txBox="1"/>
+          <p:nvPr/>
+        </p:nvSpPr>
+        <p:spPr>
+          <a:xfrm>
+            <a:off x="3977639" y="3511296"/>
+            <a:ext cx="109728" cy="146304"/>
+          </a:xfrm>
+          <a:prstGeom prst="roundRect">
+            <a:avLst>
+              <a:gd name="adj" fmla="val 10000"/>
+            </a:avLst>
+          </a:prstGeom>
+          <a:noFill/>
+          <a:ln>
+            <a:noFill/>
+          </a:ln>
+        </p:spPr>
+        <p:txBody>
+          <a:bodyPr wrap="square" lIns="0" tIns="0" rIns="0" bIns="0" anchor="t" rtlCol="0">
+            <a:noAutofit/>
+          </a:bodyPr>
+          <a:lstStyle/>
+          <a:p>
+            <a:pPr marL="0" indent="0" algn="l">
+              <a:spcBef>
+                <a:spcPts val="0"/>
+              </a:spcBef>
+              <a:buNone/>
+            </a:pPr>
+            <a:r>
+              <a:rPr lang="en-GB" sz="700" dirty="0">
+                <a:solidFill>
+                  <a:srgbClr val="5B6678"/>
+                </a:solidFill>
+                <a:latin typeface="Google Sans Flex Medium"/>
+                <a:ea typeface="Google Sans Flex Medium"/>
+                <a:cs typeface="Google Sans Flex Medium"/>
+                <a:sym typeface="Google Sans Flex Medium"/>
+              </a:rPr>
+              <a:t>·</a:t>
+            </a:r>
+            <a:endParaRPr lang="en-GB" sz="700"/>
+          </a:p>
+        </p:txBody>
+      </p:sp>
+      <p:sp>
+        <p:nvSpPr>
+          <p:cNvPr id="357" name="Shape 357"/>
+          <p:cNvSpPr txBox="1"/>
+          <p:nvPr/>
+        </p:nvSpPr>
+        <p:spPr>
+          <a:xfrm>
+            <a:off x="4096511" y="3511296"/>
+            <a:ext cx="548640" cy="146304"/>
+          </a:xfrm>
+          <a:prstGeom prst="roundRect">
+            <a:avLst>
+              <a:gd name="adj" fmla="val 10000"/>
+            </a:avLst>
+          </a:prstGeom>
+          <a:noFill/>
+          <a:ln>
+            <a:noFill/>
+          </a:ln>
+        </p:spPr>
+        <p:txBody>
+          <a:bodyPr wrap="square" lIns="0" tIns="0" rIns="0" bIns="0" anchor="t" rtlCol="0">
+            <a:noAutofit/>
+          </a:bodyPr>
+          <a:lstStyle/>
+          <a:p>
+            <a:pPr marL="0" indent="0" algn="l">
+              <a:spcBef>
+                <a:spcPts val="0"/>
+              </a:spcBef>
+              <a:buNone/>
+            </a:pPr>
+            <a:r>
+              <a:rPr lang="en-GB" sz="650" dirty="0">
+                <a:solidFill>
+                  <a:srgbClr val="1F2937"/>
+                </a:solidFill>
+                <a:latin typeface="Google Sans Flex Medium"/>
+                <a:ea typeface="Google Sans Flex Medium"/>
+                <a:cs typeface="Google Sans Flex Medium"/>
+                <a:sym typeface="Google Sans Flex Medium"/>
+              </a:rPr>
+              <a:t>Delivery</a:t>
+            </a:r>
+            <a:endParaRPr lang="en-GB" sz="650"/>
+          </a:p>
+        </p:txBody>
+      </p:sp>
+      <p:sp>
+        <p:nvSpPr>
+          <p:cNvPr id="358" name="Shape 358"/>
+          <p:cNvSpPr txBox="1"/>
+          <p:nvPr/>
+        </p:nvSpPr>
+        <p:spPr>
+          <a:xfrm>
+            <a:off x="4636007" y="3511296"/>
+            <a:ext cx="1033271" cy="146304"/>
+          </a:xfrm>
+          <a:prstGeom prst="roundRect">
+            <a:avLst>
+              <a:gd name="adj" fmla="val 10000"/>
+            </a:avLst>
+          </a:prstGeom>
+          <a:noFill/>
+          <a:ln>
+            <a:noFill/>
+          </a:ln>
+        </p:spPr>
+        <p:txBody>
+          <a:bodyPr wrap="square" lIns="0" tIns="0" rIns="0" bIns="0" anchor="t" rtlCol="0">
+            <a:noAutofit/>
+          </a:bodyPr>
+          <a:lstStyle/>
+          <a:p>
+            <a:pPr marL="0" indent="0" algn="l">
+              <a:spcBef>
+                <a:spcPts val="0"/>
+              </a:spcBef>
+              <a:buNone/>
+            </a:pPr>
+            <a:r>
+              <a:rPr lang="en-GB" sz="600" dirty="0">
+                <a:solidFill>
+                  <a:srgbClr val="5B6678"/>
+                </a:solidFill>
+                <a:latin typeface="Google Sans Flex"/>
+                <a:ea typeface="Google Sans Flex"/>
+                <a:cs typeface="Google Sans Flex"/>
+                <a:sym typeface="Google Sans Flex"/>
+              </a:rPr>
+              <a:t>Waits for packing</a:t>
+            </a:r>
+            <a:endParaRPr lang="en-GB" sz="600"/>
+          </a:p>
+        </p:txBody>
+      </p:sp>
+      <p:sp>
+        <p:nvSpPr>
+          <p:cNvPr id="359" name="Shape 359"/>
+          <p:cNvSpPr/>
+          <p:nvPr/>
+        </p:nvSpPr>
+        <p:spPr>
+          <a:xfrm>
+            <a:off x="3977639" y="3749040"/>
+            <a:ext cx="1691639" cy="566928"/>
+          </a:xfrm>
+          <a:prstGeom prst="roundRect">
+            <a:avLst>
+              <a:gd name="adj" fmla="val 10000"/>
+            </a:avLst>
+          </a:prstGeom>
+          <a:solidFill>
+            <a:srgbClr val="E5F5EB"/>
+          </a:solidFill>
+          <a:ln w="8900">
+            <a:solidFill>
+              <a:srgbClr val="91A3B8"/>
+            </a:solidFill>
+            <a:prstDash val="solid"/>
+          </a:ln>
+        </p:spPr>
+        <p:txBody>
+          <a:bodyPr wrap="square" lIns="54864" tIns="54864" rIns="54864" bIns="54864" anchor="t" rtlCol="0">
+            <a:noAutofit/>
+          </a:bodyPr>
+          <a:lstStyle/>
+          <a:p>
+            <a:pPr marL="0" indent="0" algn="l">
+              <a:spcBef>
+                <a:spcPts val="0"/>
+              </a:spcBef>
+              <a:buNone/>
+            </a:pPr>
+            <a:r>
+              <a:rPr lang="en-GB" sz="550" dirty="0">
+                <a:solidFill>
+                  <a:srgbClr val="5B6678"/>
+                </a:solidFill>
+                <a:latin typeface="Google Sans Flex Medium"/>
+                <a:ea typeface="Google Sans Flex Medium"/>
+                <a:cs typeface="Google Sans Flex Medium"/>
+                <a:sym typeface="Google Sans Flex Medium"/>
+              </a:rPr>
+              <a:t>NEXT STEP</a:t>
+            </a:r>
+            <a:endParaRPr lang="en-GB" sz="550"/>
+          </a:p>
+          <a:p>
+            <a:pPr marL="0" indent="0" algn="l">
+              <a:spcBef>
+                <a:spcPts val="0"/>
+              </a:spcBef>
+              <a:buNone/>
+            </a:pPr>
+            <a:endParaRPr lang="en-GB" sz="300"/>
+          </a:p>
+        </p:txBody>
+      </p:sp>
+      <p:sp>
+        <p:nvSpPr>
+          <p:cNvPr id="360" name="Shape 360"/>
+          <p:cNvSpPr/>
+          <p:nvPr/>
+        </p:nvSpPr>
+        <p:spPr>
+          <a:xfrm>
+            <a:off x="4032503" y="3931920"/>
+            <a:ext cx="1325880" cy="164592"/>
+          </a:xfrm>
+          <a:prstGeom prst="roundRect">
+            <a:avLst>
+              <a:gd name="adj" fmla="val 20000"/>
+            </a:avLst>
+          </a:prstGeom>
+          <a:solidFill>
+            <a:srgbClr val="FFFFFF"/>
+          </a:solidFill>
+          <a:ln w="8900">
+            <a:solidFill>
+              <a:srgbClr val="91A3B8"/>
+            </a:solidFill>
+            <a:prstDash val="solid"/>
+          </a:ln>
+        </p:spPr>
+        <p:txBody>
+          <a:bodyPr wrap="square" lIns="0" tIns="0" rIns="0" bIns="0" anchor="ctr" rtlCol="0">
+            <a:noAutofit/>
+          </a:bodyPr>
+          <a:lstStyle/>
+          <a:p>
+            <a:pPr marL="0" indent="0" algn="ctr">
+              <a:spcBef>
+                <a:spcPts val="0"/>
+              </a:spcBef>
+              <a:buNone/>
+            </a:pPr>
+            <a:r>
+              <a:rPr lang="en-GB" sz="600" dirty="0">
+                <a:solidFill>
+                  <a:srgbClr val="1F2937"/>
+                </a:solidFill>
+                <a:latin typeface="Google Sans Flex"/>
+                <a:ea typeface="Google Sans Flex"/>
+                <a:cs typeface="Google Sans Flex"/>
+                <a:sym typeface="Google Sans Flex"/>
+              </a:rPr>
+              <a:t>Send PayMongo payment link</a:t>
+            </a:r>
+            <a:endParaRPr lang="en-GB" sz="600"/>
+          </a:p>
+        </p:txBody>
+      </p:sp>
+      <p:sp>
+        <p:nvSpPr>
+          <p:cNvPr id="361" name="Shape 361"/>
+          <p:cNvSpPr/>
+          <p:nvPr/>
+        </p:nvSpPr>
+        <p:spPr>
+          <a:xfrm>
+            <a:off x="4032503" y="4178808"/>
+            <a:ext cx="1417319" cy="41148"/>
+          </a:xfrm>
+          <a:prstGeom prst="roundRect">
+            <a:avLst>
+              <a:gd name="adj" fmla="val 50000"/>
+            </a:avLst>
+          </a:prstGeom>
+          <a:solidFill>
+            <a:srgbClr val="D5DBE3"/>
+          </a:solidFill>
+          <a:ln>
+            <a:noFill/>
+          </a:ln>
+        </p:spPr>
+        <p:txBody>
+          <a:bodyPr wrap="square" lIns="36576" tIns="36576" rIns="36576" bIns="36576" anchor="t" rtlCol="0">
+            <a:noAutofit/>
+          </a:bodyPr>
+          <a:lstStyle/>
+          <a:p>
+            <a:pPr marL="0" indent="0" algn="l">
+              <a:spcBef>
+                <a:spcPts val="0"/>
+              </a:spcBef>
+              <a:buNone/>
+            </a:pPr>
+            <a:endParaRPr lang="en-GB" sz="800"/>
+          </a:p>
+        </p:txBody>
+      </p:sp>
+      <p:sp>
+        <p:nvSpPr>
+          <p:cNvPr id="362" name="Shape 362"/>
+          <p:cNvSpPr/>
+          <p:nvPr/>
+        </p:nvSpPr>
+        <p:spPr>
+          <a:xfrm>
+            <a:off x="5486400" y="2752344"/>
+            <a:ext cx="182880" cy="182880"/>
+          </a:xfrm>
+          <a:prstGeom prst="ellipse">
+            <a:avLst/>
+          </a:prstGeom>
+          <a:solidFill>
+            <a:srgbClr val="334155"/>
+          </a:solidFill>
+          <a:ln>
+            <a:noFill/>
+          </a:ln>
+        </p:spPr>
+        <p:txBody>
+          <a:bodyPr wrap="square" lIns="0" tIns="0" rIns="0" bIns="0" anchor="ctr" rtlCol="0">
+            <a:noAutofit/>
+          </a:bodyPr>
+          <a:lstStyle/>
+          <a:p>
+            <a:pPr marL="0" indent="0" algn="ctr">
+              <a:spcBef>
+                <a:spcPts val="0"/>
+              </a:spcBef>
+              <a:buNone/>
+            </a:pPr>
+            <a:r>
+              <a:rPr lang="en-GB" sz="800" dirty="0">
+                <a:solidFill>
+                  <a:srgbClr val="FFFFFF"/>
+                </a:solidFill>
+                <a:latin typeface="Google Sans Flex"/>
+                <a:ea typeface="Google Sans Flex"/>
+                <a:cs typeface="Google Sans Flex"/>
+                <a:sym typeface="Google Sans Flex"/>
+              </a:rPr>
+              <a:t>4</a:t>
+            </a:r>
+            <a:endParaRPr lang="en-GB" sz="800"/>
+          </a:p>
+        </p:txBody>
+      </p:sp>
+      <p:sp>
+        <p:nvSpPr>
+          <p:cNvPr id="363" name="Shape 363"/>
+          <p:cNvSpPr/>
+          <p:nvPr/>
+        </p:nvSpPr>
+        <p:spPr>
+          <a:xfrm>
+            <a:off x="347472" y="4626864"/>
+            <a:ext cx="182880" cy="182880"/>
+          </a:xfrm>
+          <a:prstGeom prst="ellipse">
+            <a:avLst/>
+          </a:prstGeom>
+          <a:solidFill>
+            <a:srgbClr val="334155"/>
+          </a:solidFill>
+          <a:ln>
+            <a:noFill/>
+          </a:ln>
+        </p:spPr>
+        <p:txBody>
+          <a:bodyPr wrap="square" lIns="0" tIns="0" rIns="0" bIns="0" anchor="ctr" rtlCol="0">
+            <a:noAutofit/>
+          </a:bodyPr>
+          <a:lstStyle/>
+          <a:p>
+            <a:pPr marL="0" indent="0" algn="ctr">
+              <a:spcBef>
+                <a:spcPts val="0"/>
+              </a:spcBef>
+              <a:buNone/>
+            </a:pPr>
+            <a:r>
+              <a:rPr lang="en-GB" sz="800" dirty="0">
+                <a:solidFill>
+                  <a:srgbClr val="FFFFFF"/>
+                </a:solidFill>
+                <a:latin typeface="Google Sans Flex"/>
+                <a:ea typeface="Google Sans Flex"/>
+                <a:cs typeface="Google Sans Flex"/>
+                <a:sym typeface="Google Sans Flex"/>
+              </a:rPr>
+              <a:t>1</a:t>
+            </a:r>
+            <a:endParaRPr lang="en-GB" sz="800"/>
+          </a:p>
+        </p:txBody>
+      </p:sp>
+      <p:sp>
+        <p:nvSpPr>
+          <p:cNvPr id="364" name="Shape 364"/>
+          <p:cNvSpPr txBox="1"/>
+          <p:nvPr/>
+        </p:nvSpPr>
+        <p:spPr>
+          <a:xfrm>
+            <a:off x="585216" y="4645152"/>
+            <a:ext cx="2423160" cy="164592"/>
+          </a:xfrm>
+          <a:prstGeom prst="roundRect">
+            <a:avLst>
+              <a:gd name="adj" fmla="val 10000"/>
+            </a:avLst>
+          </a:prstGeom>
+          <a:noFill/>
+          <a:ln>
+            <a:noFill/>
+          </a:ln>
+        </p:spPr>
+        <p:txBody>
+          <a:bodyPr wrap="square" lIns="0" tIns="0" rIns="0" bIns="0" anchor="t" rtlCol="0">
+            <a:noAutofit/>
+          </a:bodyPr>
+          <a:lstStyle/>
+          <a:p>
+            <a:pPr marL="0" indent="0" algn="l">
+              <a:spcBef>
+                <a:spcPts val="0"/>
+              </a:spcBef>
+              <a:buNone/>
+            </a:pPr>
+            <a:r>
+              <a:rPr lang="en-GB" sz="800" dirty="0">
+                <a:solidFill>
+                  <a:srgbClr val="334155"/>
+                </a:solidFill>
+                <a:latin typeface="Google Sans Flex"/>
+                <a:ea typeface="Google Sans Flex"/>
+                <a:cs typeface="Google Sans Flex"/>
+                <a:sym typeface="Google Sans Flex"/>
+              </a:rPr>
+              <a:t>Chats tagged with checks to do</a:t>
+            </a:r>
+            <a:endParaRPr lang="en-GB" sz="800"/>
+          </a:p>
+        </p:txBody>
+      </p:sp>
+      <p:sp>
+        <p:nvSpPr>
+          <p:cNvPr id="365" name="Shape 365"/>
+          <p:cNvSpPr/>
+          <p:nvPr/>
+        </p:nvSpPr>
+        <p:spPr>
+          <a:xfrm>
+            <a:off x="3054096" y="4626864"/>
+            <a:ext cx="182880" cy="182880"/>
+          </a:xfrm>
+          <a:prstGeom prst="ellipse">
+            <a:avLst/>
+          </a:prstGeom>
+          <a:solidFill>
+            <a:srgbClr val="334155"/>
+          </a:solidFill>
+          <a:ln>
+            <a:noFill/>
+          </a:ln>
+        </p:spPr>
+        <p:txBody>
+          <a:bodyPr wrap="square" lIns="0" tIns="0" rIns="0" bIns="0" anchor="ctr" rtlCol="0">
+            <a:noAutofit/>
+          </a:bodyPr>
+          <a:lstStyle/>
+          <a:p>
+            <a:pPr marL="0" indent="0" algn="ctr">
+              <a:spcBef>
+                <a:spcPts val="0"/>
+              </a:spcBef>
+              <a:buNone/>
+            </a:pPr>
+            <a:r>
+              <a:rPr lang="en-GB" sz="800" dirty="0">
+                <a:solidFill>
+                  <a:srgbClr val="FFFFFF"/>
+                </a:solidFill>
+                <a:latin typeface="Google Sans Flex"/>
+                <a:ea typeface="Google Sans Flex"/>
+                <a:cs typeface="Google Sans Flex"/>
+                <a:sym typeface="Google Sans Flex"/>
+              </a:rPr>
+              <a:t>2</a:t>
+            </a:r>
+            <a:endParaRPr lang="en-GB" sz="800"/>
+          </a:p>
+        </p:txBody>
+      </p:sp>
+      <p:sp>
+        <p:nvSpPr>
+          <p:cNvPr id="366" name="Shape 366"/>
+          <p:cNvSpPr txBox="1"/>
+          <p:nvPr/>
+        </p:nvSpPr>
+        <p:spPr>
+          <a:xfrm>
+            <a:off x="3291839" y="4645152"/>
+            <a:ext cx="2423160" cy="164592"/>
+          </a:xfrm>
+          <a:prstGeom prst="roundRect">
+            <a:avLst>
+              <a:gd name="adj" fmla="val 10000"/>
+            </a:avLst>
+          </a:prstGeom>
+          <a:noFill/>
+          <a:ln>
+            <a:noFill/>
+          </a:ln>
+        </p:spPr>
+        <p:txBody>
+          <a:bodyPr wrap="square" lIns="0" tIns="0" rIns="0" bIns="0" anchor="t" rtlCol="0">
+            <a:noAutofit/>
+          </a:bodyPr>
+          <a:lstStyle/>
+          <a:p>
+            <a:pPr marL="0" indent="0" algn="l">
+              <a:spcBef>
+                <a:spcPts val="0"/>
+              </a:spcBef>
+              <a:buNone/>
+            </a:pPr>
+            <a:r>
+              <a:rPr lang="en-GB" sz="800" dirty="0">
+                <a:solidFill>
+                  <a:srgbClr val="334155"/>
+                </a:solidFill>
+                <a:latin typeface="Google Sans Flex"/>
+                <a:ea typeface="Google Sans Flex"/>
+                <a:cs typeface="Google Sans Flex"/>
+                <a:sym typeface="Google Sans Flex"/>
+              </a:rPr>
+              <a:t>The customer's own messages and receipts</a:t>
+            </a:r>
+            <a:endParaRPr lang="en-GB" sz="800"/>
+          </a:p>
+        </p:txBody>
+      </p:sp>
+      <p:sp>
+        <p:nvSpPr>
+          <p:cNvPr id="367" name="Shape 367"/>
+          <p:cNvSpPr/>
+          <p:nvPr/>
+        </p:nvSpPr>
+        <p:spPr>
+          <a:xfrm>
+            <a:off x="347472" y="4828032"/>
+            <a:ext cx="182880" cy="182880"/>
+          </a:xfrm>
+          <a:prstGeom prst="ellipse">
+            <a:avLst/>
+          </a:prstGeom>
+          <a:solidFill>
+            <a:srgbClr val="334155"/>
+          </a:solidFill>
+          <a:ln>
+            <a:noFill/>
+          </a:ln>
+        </p:spPr>
+        <p:txBody>
+          <a:bodyPr wrap="square" lIns="0" tIns="0" rIns="0" bIns="0" anchor="ctr" rtlCol="0">
+            <a:noAutofit/>
+          </a:bodyPr>
+          <a:lstStyle/>
+          <a:p>
+            <a:pPr marL="0" indent="0" algn="ctr">
+              <a:spcBef>
+                <a:spcPts val="0"/>
+              </a:spcBef>
+              <a:buNone/>
+            </a:pPr>
+            <a:r>
+              <a:rPr lang="en-GB" sz="800" dirty="0">
+                <a:solidFill>
+                  <a:srgbClr val="FFFFFF"/>
+                </a:solidFill>
+                <a:latin typeface="Google Sans Flex"/>
+                <a:ea typeface="Google Sans Flex"/>
+                <a:cs typeface="Google Sans Flex"/>
+                <a:sym typeface="Google Sans Flex"/>
+              </a:rPr>
+              <a:t>3</a:t>
+            </a:r>
+            <a:endParaRPr lang="en-GB" sz="800"/>
+          </a:p>
+        </p:txBody>
+      </p:sp>
+      <p:sp>
+        <p:nvSpPr>
+          <p:cNvPr id="368" name="Shape 368"/>
+          <p:cNvSpPr txBox="1"/>
+          <p:nvPr/>
+        </p:nvSpPr>
+        <p:spPr>
+          <a:xfrm>
+            <a:off x="585216" y="4846320"/>
+            <a:ext cx="2423160" cy="164592"/>
+          </a:xfrm>
+          <a:prstGeom prst="roundRect">
+            <a:avLst>
+              <a:gd name="adj" fmla="val 10000"/>
+            </a:avLst>
+          </a:prstGeom>
+          <a:noFill/>
+          <a:ln>
+            <a:noFill/>
+          </a:ln>
+        </p:spPr>
+        <p:txBody>
+          <a:bodyPr wrap="square" lIns="0" tIns="0" rIns="0" bIns="0" anchor="t" rtlCol="0">
+            <a:noAutofit/>
+          </a:bodyPr>
+          <a:lstStyle/>
+          <a:p>
+            <a:pPr marL="0" indent="0" algn="l">
+              <a:spcBef>
+                <a:spcPts val="0"/>
+              </a:spcBef>
+              <a:buNone/>
+            </a:pPr>
+            <a:r>
+              <a:rPr lang="en-GB" sz="800" dirty="0">
+                <a:solidFill>
+                  <a:srgbClr val="334155"/>
+                </a:solidFill>
+                <a:latin typeface="Google Sans Flex"/>
+                <a:ea typeface="Google Sans Flex"/>
+                <a:cs typeface="Google Sans Flex"/>
+                <a:sym typeface="Google Sans Flex"/>
+              </a:rPr>
+              <a:t>AI brief and checks, each with what to do</a:t>
+            </a:r>
+            <a:endParaRPr lang="en-GB" sz="800"/>
+          </a:p>
+        </p:txBody>
+      </p:sp>
+      <p:sp>
+        <p:nvSpPr>
+          <p:cNvPr id="369" name="Shape 369"/>
+          <p:cNvSpPr/>
+          <p:nvPr/>
+        </p:nvSpPr>
+        <p:spPr>
+          <a:xfrm>
+            <a:off x="3054096" y="4828032"/>
+            <a:ext cx="182880" cy="182880"/>
+          </a:xfrm>
+          <a:prstGeom prst="ellipse">
+            <a:avLst/>
+          </a:prstGeom>
+          <a:solidFill>
+            <a:srgbClr val="334155"/>
+          </a:solidFill>
+          <a:ln>
+            <a:noFill/>
+          </a:ln>
+        </p:spPr>
+        <p:txBody>
+          <a:bodyPr wrap="square" lIns="0" tIns="0" rIns="0" bIns="0" anchor="ctr" rtlCol="0">
+            <a:noAutofit/>
+          </a:bodyPr>
+          <a:lstStyle/>
+          <a:p>
+            <a:pPr marL="0" indent="0" algn="ctr">
+              <a:spcBef>
+                <a:spcPts val="0"/>
+              </a:spcBef>
+              <a:buNone/>
+            </a:pPr>
+            <a:r>
+              <a:rPr lang="en-GB" sz="800" dirty="0">
+                <a:solidFill>
+                  <a:srgbClr val="FFFFFF"/>
+                </a:solidFill>
+                <a:latin typeface="Google Sans Flex"/>
+                <a:ea typeface="Google Sans Flex"/>
+                <a:cs typeface="Google Sans Flex"/>
+                <a:sym typeface="Google Sans Flex"/>
+              </a:rPr>
+              <a:t>4</a:t>
+            </a:r>
+            <a:endParaRPr lang="en-GB" sz="800"/>
+          </a:p>
+        </p:txBody>
+      </p:sp>
+      <p:sp>
+        <p:nvSpPr>
+          <p:cNvPr id="370" name="Shape 370"/>
+          <p:cNvSpPr txBox="1"/>
+          <p:nvPr/>
+        </p:nvSpPr>
+        <p:spPr>
+          <a:xfrm>
+            <a:off x="3291839" y="4846320"/>
+            <a:ext cx="2423160" cy="164592"/>
+          </a:xfrm>
+          <a:prstGeom prst="roundRect">
+            <a:avLst>
+              <a:gd name="adj" fmla="val 10000"/>
+            </a:avLst>
+          </a:prstGeom>
+          <a:noFill/>
+          <a:ln>
+            <a:noFill/>
+          </a:ln>
+        </p:spPr>
+        <p:txBody>
+          <a:bodyPr wrap="square" lIns="0" tIns="0" rIns="0" bIns="0" anchor="t" rtlCol="0">
+            <a:noAutofit/>
+          </a:bodyPr>
+          <a:lstStyle/>
+          <a:p>
+            <a:pPr marL="0" indent="0" algn="l">
+              <a:spcBef>
+                <a:spcPts val="0"/>
+              </a:spcBef>
+              <a:buNone/>
+            </a:pPr>
+            <a:r>
+              <a:rPr lang="en-GB" sz="800" dirty="0">
+                <a:solidFill>
+                  <a:srgbClr val="334155"/>
+                </a:solidFill>
+                <a:latin typeface="Google Sans Flex"/>
+                <a:ea typeface="Google Sans Flex"/>
+                <a:cs typeface="Google Sans Flex"/>
+                <a:sym typeface="Google Sans Flex"/>
+              </a:rPr>
+              <a:t>Order status, and the next step</a:t>
+            </a:r>
+            <a:endParaRPr lang="en-GB" sz="800"/>
+          </a:p>
+        </p:txBody>
+      </p:sp>
+      <p:sp>
+        <p:nvSpPr>
+          <p:cNvPr id="371" name="Shape 371"/>
+          <p:cNvSpPr txBox="1"/>
+          <p:nvPr/>
+        </p:nvSpPr>
+        <p:spPr>
+          <a:xfrm>
+            <a:off x="5989320" y="1078992"/>
+            <a:ext cx="2807208" cy="201168"/>
+          </a:xfrm>
+          <a:prstGeom prst="roundRect">
+            <a:avLst>
+              <a:gd name="adj" fmla="val 10000"/>
+            </a:avLst>
+          </a:prstGeom>
+          <a:noFill/>
+          <a:ln>
+            <a:noFill/>
+          </a:ln>
+        </p:spPr>
+        <p:txBody>
+          <a:bodyPr wrap="square" lIns="0" tIns="0" rIns="0" bIns="0" anchor="t" rtlCol="0">
+            <a:noAutofit/>
+          </a:bodyPr>
+          <a:lstStyle/>
+          <a:p>
+            <a:pPr marL="0" indent="0" algn="l">
+              <a:spcBef>
+                <a:spcPts val="0"/>
+              </a:spcBef>
+              <a:buNone/>
+            </a:pPr>
+            <a:r>
+              <a:rPr lang="en-GB" sz="1100" dirty="0">
+                <a:solidFill>
+                  <a:srgbClr val="1F2937"/>
+                </a:solidFill>
+                <a:latin typeface="Google Sans Flex Medium"/>
+                <a:ea typeface="Google Sans Flex Medium"/>
+                <a:cs typeface="Google Sans Flex Medium"/>
+                <a:sym typeface="Google Sans Flex Medium"/>
+              </a:rPr>
+              <a:t>Orders · claim review</a:t>
+            </a:r>
+            <a:endParaRPr lang="en-GB" sz="1100"/>
+          </a:p>
+        </p:txBody>
+      </p:sp>
+      <p:sp>
+        <p:nvSpPr>
+          <p:cNvPr id="372" name="Shape 372"/>
+          <p:cNvSpPr txBox="1"/>
+          <p:nvPr/>
+        </p:nvSpPr>
+        <p:spPr>
+          <a:xfrm>
+            <a:off x="5989320" y="1261872"/>
+            <a:ext cx="2807208" cy="182880"/>
+          </a:xfrm>
+          <a:prstGeom prst="roundRect">
+            <a:avLst>
+              <a:gd name="adj" fmla="val 10000"/>
+            </a:avLst>
+          </a:prstGeom>
+          <a:noFill/>
+          <a:ln>
+            <a:noFill/>
+          </a:ln>
+        </p:spPr>
+        <p:txBody>
+          <a:bodyPr wrap="square" lIns="0" tIns="0" rIns="0" bIns="0" anchor="t" rtlCol="0">
+            <a:noAutofit/>
+          </a:bodyPr>
+          <a:lstStyle/>
+          <a:p>
+            <a:pPr marL="0" indent="0" algn="l">
+              <a:spcBef>
+                <a:spcPts val="0"/>
+              </a:spcBef>
+              <a:buNone/>
+            </a:pPr>
+            <a:r>
+              <a:rPr lang="en-GB" sz="850" dirty="0">
+                <a:solidFill>
+                  <a:srgbClr val="5B6678"/>
+                </a:solidFill>
+                <a:latin typeface="Google Sans Flex"/>
+                <a:ea typeface="Google Sans Flex"/>
+                <a:cs typeface="Google Sans Flex"/>
+                <a:sym typeface="Google Sans Flex"/>
+              </a:rPr>
+              <a:t>Evidence beside the claim; AI cites each finding</a:t>
+            </a:r>
+            <a:endParaRPr lang="en-GB" sz="850"/>
+          </a:p>
+        </p:txBody>
+      </p:sp>
+      <p:sp>
+        <p:nvSpPr>
+          <p:cNvPr id="373" name="Shape 373"/>
+          <p:cNvSpPr/>
+          <p:nvPr/>
+        </p:nvSpPr>
+        <p:spPr>
+          <a:xfrm>
+            <a:off x="5989320" y="1463040"/>
+            <a:ext cx="2807208" cy="1536192"/>
+          </a:xfrm>
+          <a:prstGeom prst="roundRect">
+            <a:avLst>
+              <a:gd name="adj" fmla="val 4000"/>
+            </a:avLst>
+          </a:prstGeom>
+          <a:solidFill>
+            <a:srgbClr val="FFFFFF"/>
+          </a:solidFill>
+          <a:ln w="8900">
+            <a:solidFill>
+              <a:srgbClr val="91A3B8"/>
+            </a:solidFill>
+            <a:prstDash val="solid"/>
+          </a:ln>
+        </p:spPr>
+        <p:txBody>
+          <a:bodyPr wrap="square" lIns="36576" tIns="36576" rIns="36576" bIns="36576" anchor="t" rtlCol="0">
+            <a:noAutofit/>
+          </a:bodyPr>
+          <a:lstStyle/>
+          <a:p>
+            <a:pPr marL="0" indent="0" algn="l">
+              <a:spcBef>
+                <a:spcPts val="0"/>
+              </a:spcBef>
+              <a:buNone/>
+            </a:pPr>
+            <a:endParaRPr lang="en-GB" sz="800"/>
+          </a:p>
+        </p:txBody>
+      </p:sp>
+      <p:sp>
+        <p:nvSpPr>
+          <p:cNvPr id="374" name="Shape 374"/>
+          <p:cNvSpPr txBox="1"/>
+          <p:nvPr/>
+        </p:nvSpPr>
+        <p:spPr>
+          <a:xfrm>
+            <a:off x="6080759" y="1527048"/>
+            <a:ext cx="2624327" cy="155448"/>
+          </a:xfrm>
+          <a:prstGeom prst="roundRect">
+            <a:avLst>
+              <a:gd name="adj" fmla="val 10000"/>
+            </a:avLst>
+          </a:prstGeom>
+          <a:noFill/>
+          <a:ln>
+            <a:noFill/>
+          </a:ln>
+        </p:spPr>
+        <p:txBody>
+          <a:bodyPr wrap="square" lIns="0" tIns="0" rIns="0" bIns="0" anchor="t" rtlCol="0">
+            <a:noAutofit/>
+          </a:bodyPr>
+          <a:lstStyle/>
+          <a:p>
+            <a:pPr marL="0" indent="0" algn="l">
+              <a:spcBef>
+                <a:spcPts val="0"/>
+              </a:spcBef>
+              <a:buNone/>
+            </a:pPr>
+            <a:r>
+              <a:rPr lang="en-GB" sz="700" dirty="0">
+                <a:solidFill>
+                  <a:srgbClr val="1F2937"/>
+                </a:solidFill>
+                <a:latin typeface="Google Sans Flex Medium"/>
+                <a:ea typeface="Google Sans Flex Medium"/>
+                <a:cs typeface="Google Sans Flex Medium"/>
+                <a:sym typeface="Google Sans Flex Medium"/>
+              </a:rPr>
+              <a:t>Damaged · open · from the customer's chat</a:t>
+            </a:r>
+            <a:endParaRPr lang="en-GB" sz="700"/>
+          </a:p>
+        </p:txBody>
+      </p:sp>
+      <p:sp>
+        <p:nvSpPr>
+          <p:cNvPr id="375" name="Shape 375"/>
+          <p:cNvSpPr/>
+          <p:nvPr/>
+        </p:nvSpPr>
+        <p:spPr>
+          <a:xfrm>
+            <a:off x="6080759" y="1737360"/>
+            <a:ext cx="585216" cy="365760"/>
+          </a:xfrm>
+          <a:prstGeom prst="rect">
+            <a:avLst/>
+          </a:prstGeom>
+          <a:solidFill>
+            <a:srgbClr val="F1F3F5"/>
+          </a:solidFill>
+          <a:ln w="8900">
+            <a:solidFill>
+              <a:srgbClr val="91A3B8"/>
+            </a:solidFill>
+            <a:prstDash val="dash"/>
+          </a:ln>
+        </p:spPr>
+        <p:txBody>
+          <a:bodyPr wrap="square" lIns="18288" tIns="18288" rIns="18288" bIns="18288" anchor="ctr" rtlCol="0">
+            <a:noAutofit/>
+          </a:bodyPr>
+          <a:lstStyle/>
+          <a:p>
+            <a:pPr marL="0" indent="0" algn="ctr">
+              <a:spcBef>
+                <a:spcPts val="0"/>
+              </a:spcBef>
+              <a:buNone/>
+            </a:pPr>
+            <a:r>
+              <a:rPr lang="en-GB" sz="550" dirty="0">
+                <a:solidFill>
+                  <a:srgbClr val="5B6678"/>
+                </a:solidFill>
+                <a:latin typeface="Google Sans Flex"/>
+                <a:ea typeface="Google Sans Flex"/>
+                <a:cs typeface="Google Sans Flex"/>
+                <a:sym typeface="Google Sans Flex"/>
+              </a:rPr>
+              <a:t>photo</a:t>
+            </a:r>
+            <a:endParaRPr lang="en-GB" sz="550"/>
+          </a:p>
+        </p:txBody>
+      </p:sp>
+      <p:sp>
+        <p:nvSpPr>
+          <p:cNvPr id="376" name="Shape 376"/>
+          <p:cNvSpPr/>
+          <p:nvPr/>
+        </p:nvSpPr>
+        <p:spPr>
+          <a:xfrm>
+            <a:off x="6739127" y="1737360"/>
+            <a:ext cx="585216" cy="365760"/>
+          </a:xfrm>
+          <a:prstGeom prst="rect">
+            <a:avLst/>
+          </a:prstGeom>
+          <a:solidFill>
+            <a:srgbClr val="F1F3F5"/>
+          </a:solidFill>
+          <a:ln w="8900">
+            <a:solidFill>
+              <a:srgbClr val="91A3B8"/>
+            </a:solidFill>
+            <a:prstDash val="dash"/>
+          </a:ln>
+        </p:spPr>
+        <p:txBody>
+          <a:bodyPr wrap="square" lIns="18288" tIns="18288" rIns="18288" bIns="18288" anchor="ctr" rtlCol="0">
+            <a:noAutofit/>
+          </a:bodyPr>
+          <a:lstStyle/>
+          <a:p>
+            <a:pPr marL="0" indent="0" algn="ctr">
+              <a:spcBef>
+                <a:spcPts val="0"/>
+              </a:spcBef>
+              <a:buNone/>
+            </a:pPr>
+            <a:r>
+              <a:rPr lang="en-GB" sz="550" dirty="0">
+                <a:solidFill>
+                  <a:srgbClr val="5B6678"/>
+                </a:solidFill>
+                <a:latin typeface="Google Sans Flex"/>
+                <a:ea typeface="Google Sans Flex"/>
+                <a:cs typeface="Google Sans Flex"/>
+                <a:sym typeface="Google Sans Flex"/>
+              </a:rPr>
+              <a:t>unboxing video</a:t>
+            </a:r>
+            <a:endParaRPr lang="en-GB" sz="550"/>
+          </a:p>
+        </p:txBody>
+      </p:sp>
+      <p:sp>
+        <p:nvSpPr>
+          <p:cNvPr id="377" name="Shape 377"/>
+          <p:cNvSpPr/>
+          <p:nvPr/>
+        </p:nvSpPr>
+        <p:spPr>
+          <a:xfrm>
+            <a:off x="7397496" y="1737360"/>
+            <a:ext cx="585216" cy="365760"/>
+          </a:xfrm>
+          <a:prstGeom prst="rect">
+            <a:avLst/>
+          </a:prstGeom>
+          <a:solidFill>
+            <a:srgbClr val="F1F3F5"/>
+          </a:solidFill>
+          <a:ln w="8900">
+            <a:solidFill>
+              <a:srgbClr val="91A3B8"/>
+            </a:solidFill>
+            <a:prstDash val="dash"/>
+          </a:ln>
+        </p:spPr>
+        <p:txBody>
+          <a:bodyPr wrap="square" lIns="18288" tIns="18288" rIns="18288" bIns="18288" anchor="ctr" rtlCol="0">
+            <a:noAutofit/>
+          </a:bodyPr>
+          <a:lstStyle/>
+          <a:p>
+            <a:pPr marL="0" indent="0" algn="ctr">
+              <a:spcBef>
+                <a:spcPts val="0"/>
+              </a:spcBef>
+              <a:buNone/>
+            </a:pPr>
+            <a:r>
+              <a:rPr lang="en-GB" sz="550" dirty="0">
+                <a:solidFill>
+                  <a:srgbClr val="5B6678"/>
+                </a:solidFill>
+                <a:latin typeface="Google Sans Flex"/>
+                <a:ea typeface="Google Sans Flex"/>
+                <a:cs typeface="Google Sans Flex"/>
+                <a:sym typeface="Google Sans Flex"/>
+              </a:rPr>
+              <a:t>packing video</a:t>
+            </a:r>
+            <a:endParaRPr lang="en-GB" sz="550"/>
+          </a:p>
+        </p:txBody>
+      </p:sp>
+      <p:sp>
+        <p:nvSpPr>
+          <p:cNvPr id="378" name="Shape 378"/>
+          <p:cNvSpPr txBox="1"/>
+          <p:nvPr/>
+        </p:nvSpPr>
+        <p:spPr>
+          <a:xfrm>
+            <a:off x="6080759" y="2157984"/>
+            <a:ext cx="2624327" cy="137160"/>
+          </a:xfrm>
+          <a:prstGeom prst="roundRect">
+            <a:avLst>
+              <a:gd name="adj" fmla="val 10000"/>
+            </a:avLst>
+          </a:prstGeom>
+          <a:noFill/>
+          <a:ln>
+            <a:noFill/>
+          </a:ln>
+        </p:spPr>
+        <p:txBody>
+          <a:bodyPr wrap="square" lIns="0" tIns="0" rIns="0" bIns="0" anchor="t" rtlCol="0">
+            <a:noAutofit/>
+          </a:bodyPr>
+          <a:lstStyle/>
+          <a:p>
+            <a:pPr marL="0" indent="0" algn="l">
+              <a:spcBef>
+                <a:spcPts val="0"/>
+              </a:spcBef>
+              <a:buNone/>
+            </a:pPr>
+            <a:r>
+              <a:rPr lang="en-GB" sz="600" dirty="0">
+                <a:solidFill>
+                  <a:srgbClr val="334155"/>
+                </a:solidFill>
+                <a:latin typeface="Google Sans Flex"/>
+                <a:ea typeface="Google Sans Flex"/>
+                <a:cs typeface="Google Sans Flex"/>
+                <a:sym typeface="Google Sans Flex"/>
+              </a:rPr>
+              <a:t>▸ Custody check: suggests Unknown</a:t>
+            </a:r>
+            <a:endParaRPr lang="en-GB" sz="600"/>
+          </a:p>
+        </p:txBody>
+      </p:sp>
+      <p:sp>
+        <p:nvSpPr>
+          <p:cNvPr id="379" name="Shape 379"/>
+          <p:cNvSpPr/>
+          <p:nvPr/>
+        </p:nvSpPr>
+        <p:spPr>
+          <a:xfrm>
+            <a:off x="6080759" y="2331720"/>
+            <a:ext cx="2624327" cy="384048"/>
+          </a:xfrm>
+          <a:prstGeom prst="roundRect">
+            <a:avLst>
+              <a:gd name="adj" fmla="val 8000"/>
+            </a:avLst>
+          </a:prstGeom>
+          <a:solidFill>
+            <a:srgbClr val="E5F0FF"/>
+          </a:solidFill>
+          <a:ln>
+            <a:noFill/>
+          </a:ln>
+        </p:spPr>
+        <p:txBody>
+          <a:bodyPr wrap="square" lIns="45720" tIns="45720" rIns="45720" bIns="45720" anchor="t" rtlCol="0">
+            <a:noAutofit/>
+          </a:bodyPr>
+          <a:lstStyle/>
+          <a:p>
+            <a:pPr marL="0" indent="0" algn="l">
+              <a:spcBef>
+                <a:spcPts val="0"/>
+              </a:spcBef>
+              <a:buNone/>
+            </a:pPr>
+            <a:r>
+              <a:rPr lang="en-GB" sz="600" dirty="0">
+                <a:solidFill>
+                  <a:srgbClr val="1F2937"/>
+                </a:solidFill>
+                <a:latin typeface="Google Sans Flex"/>
+                <a:ea typeface="Google Sans Flex"/>
+                <a:cs typeface="Google Sans Flex"/>
+                <a:sym typeface="Google Sans Flex"/>
+              </a:rPr>
+              <a:t>AI review: Supported · packed intact  [KP1] [KV1C]</a:t>
+            </a:r>
+            <a:endParaRPr lang="en-GB" sz="600"/>
+          </a:p>
+          <a:p>
+            <a:pPr marL="0" indent="0" algn="l">
+              <a:spcBef>
+                <a:spcPts val="100"/>
+              </a:spcBef>
+              <a:buNone/>
+            </a:pPr>
+            <a:r>
+              <a:rPr lang="en-GB" sz="600" dirty="0">
+                <a:solidFill>
+                  <a:srgbClr val="1F2937"/>
+                </a:solidFill>
+                <a:latin typeface="Google Sans Flex Medium"/>
+                <a:ea typeface="Google Sans Flex Medium"/>
+                <a:cs typeface="Google Sans Flex Medium"/>
+                <a:sym typeface="Google Sans Flex Medium"/>
+              </a:rPr>
+              <a:t>Suggested: Send a replacement  [CV1C] [P1]</a:t>
+            </a:r>
+            <a:endParaRPr lang="en-GB" sz="600"/>
+          </a:p>
+        </p:txBody>
+      </p:sp>
+      <p:sp>
+        <p:nvSpPr>
+          <p:cNvPr id="380" name="Shape 380"/>
+          <p:cNvSpPr/>
+          <p:nvPr/>
+        </p:nvSpPr>
+        <p:spPr>
+          <a:xfrm>
+            <a:off x="6080759" y="2779776"/>
+            <a:ext cx="731520" cy="155448"/>
+          </a:xfrm>
+          <a:prstGeom prst="roundRect">
+            <a:avLst>
+              <a:gd name="adj" fmla="val 20000"/>
+            </a:avLst>
+          </a:prstGeom>
+          <a:solidFill>
+            <a:srgbClr val="FFFFFF"/>
+          </a:solidFill>
+          <a:ln w="8900">
+            <a:solidFill>
+              <a:srgbClr val="91A3B8"/>
+            </a:solidFill>
+            <a:prstDash val="solid"/>
+          </a:ln>
+        </p:spPr>
+        <p:txBody>
+          <a:bodyPr wrap="square" lIns="0" tIns="0" rIns="0" bIns="0" anchor="ctr" rtlCol="0">
+            <a:noAutofit/>
+          </a:bodyPr>
+          <a:lstStyle/>
+          <a:p>
+            <a:pPr marL="0" indent="0" algn="ctr">
+              <a:spcBef>
+                <a:spcPts val="0"/>
+              </a:spcBef>
+              <a:buNone/>
+            </a:pPr>
+            <a:r>
+              <a:rPr lang="en-GB" sz="600" dirty="0">
+                <a:solidFill>
+                  <a:srgbClr val="1F2937"/>
+                </a:solidFill>
+                <a:latin typeface="Google Sans Flex"/>
+                <a:ea typeface="Google Sans Flex"/>
+                <a:cs typeface="Google Sans Flex"/>
+                <a:sym typeface="Google Sans Flex"/>
+              </a:rPr>
+              <a:t>Review with AI</a:t>
+            </a:r>
+            <a:endParaRPr lang="en-GB" sz="600"/>
+          </a:p>
+        </p:txBody>
+      </p:sp>
+      <p:sp>
+        <p:nvSpPr>
+          <p:cNvPr id="381" name="Shape 381"/>
+          <p:cNvSpPr/>
+          <p:nvPr/>
+        </p:nvSpPr>
+        <p:spPr>
+          <a:xfrm>
+            <a:off x="6867143" y="2779776"/>
+            <a:ext cx="868680" cy="155448"/>
+          </a:xfrm>
+          <a:prstGeom prst="roundRect">
+            <a:avLst>
+              <a:gd name="adj" fmla="val 20000"/>
+            </a:avLst>
+          </a:prstGeom>
+          <a:solidFill>
+            <a:srgbClr val="FFFFFF"/>
+          </a:solidFill>
+          <a:ln w="8900">
+            <a:solidFill>
+              <a:srgbClr val="91A3B8"/>
+            </a:solidFill>
+            <a:prstDash val="solid"/>
+          </a:ln>
+        </p:spPr>
+        <p:txBody>
+          <a:bodyPr wrap="square" lIns="0" tIns="0" rIns="0" bIns="0" anchor="ctr" rtlCol="0">
+            <a:noAutofit/>
+          </a:bodyPr>
+          <a:lstStyle/>
+          <a:p>
+            <a:pPr marL="0" indent="0" algn="ctr">
+              <a:spcBef>
+                <a:spcPts val="0"/>
+              </a:spcBef>
+              <a:buNone/>
+            </a:pPr>
+            <a:r>
+              <a:rPr lang="en-GB" sz="600" dirty="0">
+                <a:solidFill>
+                  <a:srgbClr val="1F2937"/>
+                </a:solidFill>
+                <a:latin typeface="Google Sans Flex"/>
+                <a:ea typeface="Google Sans Flex"/>
+                <a:cs typeface="Google Sans Flex"/>
+                <a:sym typeface="Google Sans Flex"/>
+              </a:rPr>
+              <a:t>Decide without AI</a:t>
+            </a:r>
+            <a:endParaRPr lang="en-GB" sz="600"/>
+          </a:p>
+        </p:txBody>
+      </p:sp>
+      <p:sp>
+        <p:nvSpPr>
+          <p:cNvPr id="382" name="Shape 382"/>
+          <p:cNvSpPr/>
+          <p:nvPr/>
+        </p:nvSpPr>
+        <p:spPr>
+          <a:xfrm>
+            <a:off x="7790687" y="2779776"/>
+            <a:ext cx="502920" cy="155448"/>
+          </a:xfrm>
+          <a:prstGeom prst="roundRect">
+            <a:avLst>
+              <a:gd name="adj" fmla="val 20000"/>
+            </a:avLst>
+          </a:prstGeom>
+          <a:solidFill>
+            <a:srgbClr val="FFFFFF"/>
+          </a:solidFill>
+          <a:ln w="8900">
+            <a:solidFill>
+              <a:srgbClr val="91A3B8"/>
+            </a:solidFill>
+            <a:prstDash val="solid"/>
+          </a:ln>
+        </p:spPr>
+        <p:txBody>
+          <a:bodyPr wrap="square" lIns="0" tIns="0" rIns="0" bIns="0" anchor="ctr" rtlCol="0">
+            <a:noAutofit/>
+          </a:bodyPr>
+          <a:lstStyle/>
+          <a:p>
+            <a:pPr marL="0" indent="0" algn="ctr">
+              <a:spcBef>
+                <a:spcPts val="0"/>
+              </a:spcBef>
+              <a:buNone/>
+            </a:pPr>
+            <a:r>
+              <a:rPr lang="en-GB" sz="600" dirty="0">
+                <a:solidFill>
+                  <a:srgbClr val="1F2937"/>
+                </a:solidFill>
+                <a:latin typeface="Google Sans Flex"/>
+                <a:ea typeface="Google Sans Flex"/>
+                <a:cs typeface="Google Sans Flex"/>
+                <a:sym typeface="Google Sans Flex"/>
+              </a:rPr>
+              <a:t>Escalate</a:t>
+            </a:r>
+            <a:endParaRPr lang="en-GB" sz="600"/>
+          </a:p>
+        </p:txBody>
+      </p:sp>
+      <p:sp>
+        <p:nvSpPr>
+          <p:cNvPr id="383" name="Shape 383"/>
+          <p:cNvSpPr txBox="1"/>
+          <p:nvPr/>
+        </p:nvSpPr>
+        <p:spPr>
+          <a:xfrm>
+            <a:off x="5989320" y="3108960"/>
+            <a:ext cx="2807208" cy="201168"/>
+          </a:xfrm>
+          <a:prstGeom prst="roundRect">
+            <a:avLst>
+              <a:gd name="adj" fmla="val 10000"/>
+            </a:avLst>
+          </a:prstGeom>
+          <a:noFill/>
+          <a:ln>
+            <a:noFill/>
+          </a:ln>
+        </p:spPr>
+        <p:txBody>
+          <a:bodyPr wrap="square" lIns="0" tIns="0" rIns="0" bIns="0" anchor="t" rtlCol="0">
+            <a:noAutofit/>
+          </a:bodyPr>
+          <a:lstStyle/>
+          <a:p>
+            <a:pPr marL="0" indent="0" algn="l">
+              <a:spcBef>
+                <a:spcPts val="0"/>
+              </a:spcBef>
+              <a:buNone/>
+            </a:pPr>
+            <a:r>
+              <a:rPr lang="en-GB" sz="1100" dirty="0">
+                <a:solidFill>
+                  <a:srgbClr val="1F2937"/>
+                </a:solidFill>
+                <a:latin typeface="Google Sans Flex Medium"/>
+                <a:ea typeface="Google Sans Flex Medium"/>
+                <a:cs typeface="Google Sans Flex Medium"/>
+                <a:sym typeface="Google Sans Flex Medium"/>
+              </a:rPr>
+              <a:t>Patterns</a:t>
+            </a:r>
+            <a:endParaRPr lang="en-GB" sz="1100"/>
+          </a:p>
+        </p:txBody>
+      </p:sp>
+      <p:sp>
+        <p:nvSpPr>
+          <p:cNvPr id="384" name="Shape 384"/>
+          <p:cNvSpPr txBox="1"/>
+          <p:nvPr/>
+        </p:nvSpPr>
+        <p:spPr>
+          <a:xfrm>
+            <a:off x="5989320" y="3291840"/>
+            <a:ext cx="2807208" cy="182880"/>
+          </a:xfrm>
+          <a:prstGeom prst="roundRect">
+            <a:avLst>
+              <a:gd name="adj" fmla="val 10000"/>
+            </a:avLst>
+          </a:prstGeom>
+          <a:noFill/>
+          <a:ln>
+            <a:noFill/>
+          </a:ln>
+        </p:spPr>
+        <p:txBody>
+          <a:bodyPr wrap="square" lIns="0" tIns="0" rIns="0" bIns="0" anchor="t" rtlCol="0">
+            <a:noAutofit/>
+          </a:bodyPr>
+          <a:lstStyle/>
+          <a:p>
+            <a:pPr marL="0" indent="0" algn="l">
+              <a:spcBef>
+                <a:spcPts val="0"/>
+              </a:spcBef>
+              <a:buNone/>
+            </a:pPr>
+            <a:r>
+              <a:rPr lang="en-GB" sz="850" dirty="0">
+                <a:solidFill>
+                  <a:srgbClr val="5B6678"/>
+                </a:solidFill>
+                <a:latin typeface="Google Sans Flex"/>
+                <a:ea typeface="Google Sans Flex"/>
+                <a:cs typeface="Google Sans Flex"/>
+                <a:sym typeface="Google Sans Flex"/>
+              </a:rPr>
+              <a:t>What the checks found across chats, against the weeks before</a:t>
+            </a:r>
+            <a:endParaRPr lang="en-GB" sz="850"/>
+          </a:p>
+        </p:txBody>
+      </p:sp>
+      <p:sp>
+        <p:nvSpPr>
+          <p:cNvPr id="385" name="Shape 385"/>
+          <p:cNvSpPr/>
+          <p:nvPr/>
+        </p:nvSpPr>
+        <p:spPr>
+          <a:xfrm>
+            <a:off x="5989320" y="3493008"/>
+            <a:ext cx="2807208" cy="1463040"/>
+          </a:xfrm>
+          <a:prstGeom prst="roundRect">
+            <a:avLst>
+              <a:gd name="adj" fmla="val 4000"/>
+            </a:avLst>
+          </a:prstGeom>
+          <a:solidFill>
+            <a:srgbClr val="FFFFFF"/>
+          </a:solidFill>
+          <a:ln w="8900">
+            <a:solidFill>
+              <a:srgbClr val="91A3B8"/>
+            </a:solidFill>
+            <a:prstDash val="solid"/>
+          </a:ln>
+        </p:spPr>
+        <p:txBody>
+          <a:bodyPr wrap="square" lIns="36576" tIns="36576" rIns="36576" bIns="36576" anchor="t" rtlCol="0">
+            <a:noAutofit/>
+          </a:bodyPr>
+          <a:lstStyle/>
+          <a:p>
+            <a:pPr marL="0" indent="0" algn="l">
+              <a:spcBef>
+                <a:spcPts val="0"/>
+              </a:spcBef>
+              <a:buNone/>
+            </a:pPr>
+            <a:endParaRPr lang="en-GB" sz="800"/>
+          </a:p>
+        </p:txBody>
+      </p:sp>
+      <p:sp>
+        <p:nvSpPr>
+          <p:cNvPr id="386" name="Shape 386"/>
+          <p:cNvSpPr txBox="1"/>
+          <p:nvPr/>
+        </p:nvSpPr>
+        <p:spPr>
+          <a:xfrm>
+            <a:off x="6080759" y="3557015"/>
+            <a:ext cx="2624327" cy="155448"/>
+          </a:xfrm>
+          <a:prstGeom prst="roundRect">
+            <a:avLst>
+              <a:gd name="adj" fmla="val 10000"/>
+            </a:avLst>
+          </a:prstGeom>
+          <a:noFill/>
+          <a:ln>
+            <a:noFill/>
+          </a:ln>
+        </p:spPr>
+        <p:txBody>
+          <a:bodyPr wrap="square" lIns="0" tIns="0" rIns="0" bIns="0" anchor="t" rtlCol="0">
+            <a:noAutofit/>
+          </a:bodyPr>
+          <a:lstStyle/>
+          <a:p>
+            <a:pPr marL="0" indent="0" algn="l">
+              <a:spcBef>
+                <a:spcPts val="0"/>
+              </a:spcBef>
+              <a:buNone/>
+            </a:pPr>
+            <a:r>
+              <a:rPr lang="en-GB" sz="700" dirty="0">
+                <a:solidFill>
+                  <a:srgbClr val="1F2937"/>
+                </a:solidFill>
+                <a:latin typeface="Google Sans Flex Medium"/>
+                <a:ea typeface="Google Sans Flex Medium"/>
+                <a:cs typeface="Google Sans Flex Medium"/>
+                <a:sym typeface="Google Sans Flex Medium"/>
+              </a:rPr>
+              <a:t>Receipts that don't fit the order or your GCash</a:t>
+            </a:r>
+            <a:endParaRPr lang="en-GB" sz="700"/>
+          </a:p>
+        </p:txBody>
+      </p:sp>
+      <p:sp>
+        <p:nvSpPr>
+          <p:cNvPr id="387" name="Shape 387"/>
+          <p:cNvSpPr/>
+          <p:nvPr/>
+        </p:nvSpPr>
+        <p:spPr>
+          <a:xfrm>
+            <a:off x="6080759" y="3739896"/>
+            <a:ext cx="1417320" cy="137160"/>
+          </a:xfrm>
+          <a:prstGeom prst="roundRect">
+            <a:avLst>
+              <a:gd name="adj" fmla="val 30000"/>
+            </a:avLst>
+          </a:prstGeom>
+          <a:solidFill>
+            <a:srgbClr val="E5F5EB"/>
+          </a:solidFill>
+          <a:ln>
+            <a:noFill/>
+          </a:ln>
+        </p:spPr>
+        <p:txBody>
+          <a:bodyPr wrap="square" lIns="27432" tIns="27432" rIns="27432" bIns="27432" anchor="ctr" rtlCol="0">
+            <a:noAutofit/>
+          </a:bodyPr>
+          <a:lstStyle/>
+          <a:p>
+            <a:pPr marL="0" indent="0" algn="l">
+              <a:spcBef>
+                <a:spcPts val="0"/>
+              </a:spcBef>
+              <a:buNone/>
+            </a:pPr>
+            <a:r>
+              <a:rPr lang="en-GB" sz="550" dirty="0">
+                <a:solidFill>
+                  <a:srgbClr val="0B6E66"/>
+                </a:solidFill>
+                <a:latin typeface="Google Sans Flex"/>
+                <a:ea typeface="Google Sans Flex"/>
+                <a:cs typeface="Google Sans Flex"/>
+                <a:sym typeface="Google Sans Flex"/>
+              </a:rPr>
+              <a:t>Up from 3 since your last look</a:t>
+            </a:r>
+            <a:endParaRPr lang="en-GB" sz="550"/>
+          </a:p>
+        </p:txBody>
+      </p:sp>
+      <p:sp>
+        <p:nvSpPr>
+          <p:cNvPr id="388" name="Shape 388"/>
+          <p:cNvSpPr/>
+          <p:nvPr/>
+        </p:nvSpPr>
+        <p:spPr>
+          <a:xfrm>
+            <a:off x="6172200" y="4389120"/>
+            <a:ext cx="219456" cy="18288"/>
+          </a:xfrm>
+          <a:prstGeom prst="rect">
+            <a:avLst/>
+          </a:prstGeom>
+          <a:solidFill>
+            <a:srgbClr val="C3CCD6"/>
+          </a:solidFill>
+          <a:ln>
+            <a:noFill/>
+          </a:ln>
+        </p:spPr>
+        <p:txBody>
+          <a:bodyPr wrap="square" lIns="36576" tIns="36576" rIns="36576" bIns="36576" anchor="t" rtlCol="0">
+            <a:noAutofit/>
+          </a:bodyPr>
+          <a:lstStyle/>
+          <a:p>
+            <a:pPr marL="0" indent="0" algn="l">
+              <a:spcBef>
+                <a:spcPts val="0"/>
+              </a:spcBef>
+              <a:buNone/>
+            </a:pPr>
+            <a:endParaRPr lang="en-GB" sz="800"/>
+          </a:p>
+        </p:txBody>
+      </p:sp>
+      <p:sp>
+        <p:nvSpPr>
+          <p:cNvPr id="389" name="Shape 389"/>
+          <p:cNvSpPr txBox="1"/>
+          <p:nvPr/>
+        </p:nvSpPr>
+        <p:spPr>
+          <a:xfrm>
+            <a:off x="6099048" y="4425696"/>
+            <a:ext cx="365760" cy="118872"/>
+          </a:xfrm>
+          <a:prstGeom prst="roundRect">
+            <a:avLst>
+              <a:gd name="adj" fmla="val 10000"/>
+            </a:avLst>
+          </a:prstGeom>
+          <a:noFill/>
+          <a:ln>
+            <a:noFill/>
+          </a:ln>
+        </p:spPr>
+        <p:txBody>
+          <a:bodyPr wrap="square" lIns="0" tIns="0" rIns="0" bIns="0" anchor="t" rtlCol="0">
+            <a:noAutofit/>
+          </a:bodyPr>
+          <a:lstStyle/>
+          <a:p>
+            <a:pPr marL="0" indent="0" algn="ctr">
+              <a:spcBef>
+                <a:spcPts val="0"/>
+              </a:spcBef>
+              <a:buNone/>
+            </a:pPr>
+            <a:r>
+              <a:rPr lang="en-GB" sz="500" dirty="0">
+                <a:solidFill>
+                  <a:srgbClr val="5B6678"/>
+                </a:solidFill>
+                <a:latin typeface="Google Sans Flex"/>
+                <a:ea typeface="Google Sans Flex"/>
+                <a:cs typeface="Google Sans Flex"/>
+                <a:sym typeface="Google Sans Flex"/>
+              </a:rPr>
+              <a:t>3 wk</a:t>
+            </a:r>
+            <a:endParaRPr lang="en-GB" sz="500"/>
+          </a:p>
+        </p:txBody>
+      </p:sp>
+      <p:sp>
+        <p:nvSpPr>
+          <p:cNvPr id="390" name="Shape 390"/>
+          <p:cNvSpPr/>
+          <p:nvPr/>
+        </p:nvSpPr>
+        <p:spPr>
+          <a:xfrm>
+            <a:off x="6519672" y="4389120"/>
+            <a:ext cx="219456" cy="18288"/>
+          </a:xfrm>
+          <a:prstGeom prst="rect">
+            <a:avLst/>
+          </a:prstGeom>
+          <a:solidFill>
+            <a:srgbClr val="C3CCD6"/>
+          </a:solidFill>
+          <a:ln>
+            <a:noFill/>
+          </a:ln>
+        </p:spPr>
+        <p:txBody>
+          <a:bodyPr wrap="square" lIns="36576" tIns="36576" rIns="36576" bIns="36576" anchor="t" rtlCol="0">
+            <a:noAutofit/>
+          </a:bodyPr>
+          <a:lstStyle/>
+          <a:p>
+            <a:pPr marL="0" indent="0" algn="l">
+              <a:spcBef>
+                <a:spcPts val="0"/>
+              </a:spcBef>
+              <a:buNone/>
+            </a:pPr>
+            <a:endParaRPr lang="en-GB" sz="800"/>
+          </a:p>
+        </p:txBody>
+      </p:sp>
+      <p:sp>
+        <p:nvSpPr>
+          <p:cNvPr id="391" name="Shape 391"/>
+          <p:cNvSpPr txBox="1"/>
+          <p:nvPr/>
+        </p:nvSpPr>
+        <p:spPr>
+          <a:xfrm>
+            <a:off x="6446520" y="4425696"/>
+            <a:ext cx="365760" cy="118872"/>
+          </a:xfrm>
+          <a:prstGeom prst="roundRect">
+            <a:avLst>
+              <a:gd name="adj" fmla="val 10000"/>
+            </a:avLst>
+          </a:prstGeom>
+          <a:noFill/>
+          <a:ln>
+            <a:noFill/>
+          </a:ln>
+        </p:spPr>
+        <p:txBody>
+          <a:bodyPr wrap="square" lIns="0" tIns="0" rIns="0" bIns="0" anchor="t" rtlCol="0">
+            <a:noAutofit/>
+          </a:bodyPr>
+          <a:lstStyle/>
+          <a:p>
+            <a:pPr marL="0" indent="0" algn="ctr">
+              <a:spcBef>
+                <a:spcPts val="0"/>
+              </a:spcBef>
+              <a:buNone/>
+            </a:pPr>
+            <a:r>
+              <a:rPr lang="en-GB" sz="500" dirty="0">
+                <a:solidFill>
+                  <a:srgbClr val="5B6678"/>
+                </a:solidFill>
+                <a:latin typeface="Google Sans Flex"/>
+                <a:ea typeface="Google Sans Flex"/>
+                <a:cs typeface="Google Sans Flex"/>
+                <a:sym typeface="Google Sans Flex"/>
+              </a:rPr>
+              <a:t>2 wk</a:t>
+            </a:r>
+            <a:endParaRPr lang="en-GB" sz="500"/>
+          </a:p>
+        </p:txBody>
+      </p:sp>
+      <p:sp>
+        <p:nvSpPr>
+          <p:cNvPr id="392" name="Shape 392"/>
+          <p:cNvSpPr/>
+          <p:nvPr/>
+        </p:nvSpPr>
+        <p:spPr>
+          <a:xfrm>
+            <a:off x="6867144" y="4389120"/>
+            <a:ext cx="219456" cy="18288"/>
+          </a:xfrm>
+          <a:prstGeom prst="rect">
+            <a:avLst/>
+          </a:prstGeom>
+          <a:solidFill>
+            <a:srgbClr val="C3CCD6"/>
+          </a:solidFill>
+          <a:ln>
+            <a:noFill/>
+          </a:ln>
+        </p:spPr>
+        <p:txBody>
+          <a:bodyPr wrap="square" lIns="36576" tIns="36576" rIns="36576" bIns="36576" anchor="t" rtlCol="0">
+            <a:noAutofit/>
+          </a:bodyPr>
+          <a:lstStyle/>
+          <a:p>
+            <a:pPr marL="0" indent="0" algn="l">
+              <a:spcBef>
+                <a:spcPts val="0"/>
+              </a:spcBef>
+              <a:buNone/>
+            </a:pPr>
+            <a:endParaRPr lang="en-GB" sz="800"/>
+          </a:p>
+        </p:txBody>
+      </p:sp>
+      <p:sp>
+        <p:nvSpPr>
+          <p:cNvPr id="393" name="Shape 393"/>
+          <p:cNvSpPr txBox="1"/>
+          <p:nvPr/>
+        </p:nvSpPr>
+        <p:spPr>
+          <a:xfrm>
+            <a:off x="6793992" y="4425696"/>
+            <a:ext cx="365760" cy="118872"/>
+          </a:xfrm>
+          <a:prstGeom prst="roundRect">
+            <a:avLst>
+              <a:gd name="adj" fmla="val 10000"/>
+            </a:avLst>
+          </a:prstGeom>
+          <a:noFill/>
+          <a:ln>
+            <a:noFill/>
+          </a:ln>
+        </p:spPr>
+        <p:txBody>
+          <a:bodyPr wrap="square" lIns="0" tIns="0" rIns="0" bIns="0" anchor="t" rtlCol="0">
+            <a:noAutofit/>
+          </a:bodyPr>
+          <a:lstStyle/>
+          <a:p>
+            <a:pPr marL="0" indent="0" algn="ctr">
+              <a:spcBef>
+                <a:spcPts val="0"/>
+              </a:spcBef>
+              <a:buNone/>
+            </a:pPr>
+            <a:r>
+              <a:rPr lang="en-GB" sz="500" dirty="0">
+                <a:solidFill>
+                  <a:srgbClr val="5B6678"/>
+                </a:solidFill>
+                <a:latin typeface="Google Sans Flex"/>
+                <a:ea typeface="Google Sans Flex"/>
+                <a:cs typeface="Google Sans Flex"/>
+                <a:sym typeface="Google Sans Flex"/>
+              </a:rPr>
+              <a:t>last wk</a:t>
+            </a:r>
+            <a:endParaRPr lang="en-GB" sz="500"/>
+          </a:p>
+        </p:txBody>
+      </p:sp>
+      <p:sp>
+        <p:nvSpPr>
+          <p:cNvPr id="394" name="Shape 394"/>
+          <p:cNvSpPr/>
+          <p:nvPr/>
+        </p:nvSpPr>
+        <p:spPr>
+          <a:xfrm>
+            <a:off x="7214616" y="3968496"/>
+            <a:ext cx="219456" cy="438912"/>
+          </a:xfrm>
+          <a:prstGeom prst="rect">
+            <a:avLst/>
+          </a:prstGeom>
+          <a:solidFill>
+            <a:srgbClr val="B45309"/>
+          </a:solidFill>
+          <a:ln>
+            <a:noFill/>
+          </a:ln>
+        </p:spPr>
+        <p:txBody>
+          <a:bodyPr wrap="square" lIns="36576" tIns="36576" rIns="36576" bIns="36576" anchor="t" rtlCol="0">
+            <a:noAutofit/>
+          </a:bodyPr>
+          <a:lstStyle/>
+          <a:p>
+            <a:pPr marL="0" indent="0" algn="l">
+              <a:spcBef>
+                <a:spcPts val="0"/>
+              </a:spcBef>
+              <a:buNone/>
+            </a:pPr>
+            <a:endParaRPr lang="en-GB" sz="800"/>
+          </a:p>
+        </p:txBody>
+      </p:sp>
+      <p:sp>
+        <p:nvSpPr>
+          <p:cNvPr id="395" name="Shape 395"/>
+          <p:cNvSpPr txBox="1"/>
+          <p:nvPr/>
+        </p:nvSpPr>
+        <p:spPr>
+          <a:xfrm>
+            <a:off x="7141464" y="4425696"/>
+            <a:ext cx="365760" cy="118872"/>
+          </a:xfrm>
+          <a:prstGeom prst="roundRect">
+            <a:avLst>
+              <a:gd name="adj" fmla="val 10000"/>
+            </a:avLst>
+          </a:prstGeom>
+          <a:noFill/>
+          <a:ln>
+            <a:noFill/>
+          </a:ln>
+        </p:spPr>
+        <p:txBody>
+          <a:bodyPr wrap="square" lIns="0" tIns="0" rIns="0" bIns="0" anchor="t" rtlCol="0">
+            <a:noAutofit/>
+          </a:bodyPr>
+          <a:lstStyle/>
+          <a:p>
+            <a:pPr marL="0" indent="0" algn="ctr">
+              <a:spcBef>
+                <a:spcPts val="0"/>
+              </a:spcBef>
+              <a:buNone/>
+            </a:pPr>
+            <a:r>
+              <a:rPr lang="en-GB" sz="500" dirty="0">
+                <a:solidFill>
+                  <a:srgbClr val="5B6678"/>
+                </a:solidFill>
+                <a:latin typeface="Google Sans Flex"/>
+                <a:ea typeface="Google Sans Flex"/>
+                <a:cs typeface="Google Sans Flex"/>
+                <a:sym typeface="Google Sans Flex"/>
+              </a:rPr>
+              <a:t>7 days</a:t>
+            </a:r>
+            <a:endParaRPr lang="en-GB" sz="500"/>
+          </a:p>
+        </p:txBody>
+      </p:sp>
+      <p:sp>
+        <p:nvSpPr>
+          <p:cNvPr id="396" name="Shape 396"/>
+          <p:cNvSpPr txBox="1"/>
+          <p:nvPr/>
+        </p:nvSpPr>
+        <p:spPr>
+          <a:xfrm>
+            <a:off x="7589520" y="3950208"/>
+            <a:ext cx="1143000" cy="548640"/>
+          </a:xfrm>
+          <a:prstGeom prst="roundRect">
+            <a:avLst>
+              <a:gd name="adj" fmla="val 10000"/>
+            </a:avLst>
+          </a:prstGeom>
+          <a:noFill/>
+          <a:ln>
+            <a:noFill/>
+          </a:ln>
+        </p:spPr>
+        <p:txBody>
+          <a:bodyPr wrap="square" lIns="0" tIns="0" rIns="0" bIns="0" anchor="t" rtlCol="0">
+            <a:noAutofit/>
+          </a:bodyPr>
+          <a:lstStyle/>
+          <a:p>
+            <a:pPr marL="0" indent="0" algn="l">
+              <a:spcBef>
+                <a:spcPts val="0"/>
+              </a:spcBef>
+              <a:buNone/>
+            </a:pPr>
+            <a:r>
+              <a:rPr lang="en-GB" sz="900" dirty="0">
+                <a:solidFill>
+                  <a:srgbClr val="1F2937"/>
+                </a:solidFill>
+                <a:latin typeface="Google Sans Flex Medium"/>
+                <a:ea typeface="Google Sans Flex Medium"/>
+                <a:cs typeface="Google Sans Flex Medium"/>
+                <a:sym typeface="Google Sans Flex Medium"/>
+              </a:rPr>
+              <a:t>4 chats</a:t>
+            </a:r>
+            <a:endParaRPr lang="en-GB" sz="900"/>
+          </a:p>
+          <a:p>
+            <a:pPr marL="0" indent="0" algn="l">
+              <a:spcBef>
+                <a:spcPts val="0"/>
+              </a:spcBef>
+              <a:buNone/>
+            </a:pPr>
+            <a:r>
+              <a:rPr lang="en-GB" sz="600" dirty="0">
+                <a:solidFill>
+                  <a:srgbClr val="5B6678"/>
+                </a:solidFill>
+                <a:latin typeface="Google Sans Flex"/>
+                <a:ea typeface="Google Sans Flex"/>
+                <a:cs typeface="Google Sans Flex"/>
+                <a:sym typeface="Google Sans Flex"/>
+              </a:rPr>
+              <a:t>Mark (today), Paolo, Grace, Jerome</a:t>
+            </a:r>
+            <a:endParaRPr lang="en-GB" sz="600"/>
+          </a:p>
+        </p:txBody>
+      </p:sp>
+      <p:sp>
+        <p:nvSpPr>
+          <p:cNvPr id="397" name="Shape 397"/>
+          <p:cNvSpPr txBox="1"/>
+          <p:nvPr/>
+        </p:nvSpPr>
+        <p:spPr>
+          <a:xfrm>
+            <a:off x="6080759" y="4590288"/>
+            <a:ext cx="2624327" cy="292608"/>
+          </a:xfrm>
+          <a:prstGeom prst="roundRect">
+            <a:avLst>
+              <a:gd name="adj" fmla="val 10000"/>
+            </a:avLst>
+          </a:prstGeom>
+          <a:noFill/>
+          <a:ln>
+            <a:noFill/>
+          </a:ln>
+        </p:spPr>
+        <p:txBody>
+          <a:bodyPr wrap="square" lIns="0" tIns="0" rIns="0" bIns="0" anchor="t" rtlCol="0">
+            <a:noAutofit/>
+          </a:bodyPr>
+          <a:lstStyle/>
+          <a:p>
+            <a:pPr marL="0" indent="0" algn="l">
+              <a:spcBef>
+                <a:spcPts val="0"/>
+              </a:spcBef>
+              <a:buNone/>
+            </a:pPr>
+            <a:r>
+              <a:rPr lang="en-GB" sz="600" dirty="0">
+                <a:solidFill>
+                  <a:srgbClr val="334155"/>
+                </a:solidFill>
+                <a:latin typeface="Google Sans Flex"/>
+                <a:ea typeface="Google Sans Flex"/>
+                <a:cs typeface="Google Sans Flex"/>
+                <a:sym typeface="Google Sans Flex"/>
+              </a:rPr>
+              <a:t>Next: ship only once you find the payment in your own GCash history.</a:t>
+            </a:r>
+            <a:endParaRPr lang="en-GB" sz="600"/>
           </a:p>
         </p:txBody>
       </p:sp>

--- a/docs/Team ServerMaya Submission _ AI Builder Cup.pptx
+++ b/docs/Team ServerMaya Submission _ AI Builder Cup.pptx
@@ -17499,13 +17499,7 @@
             </a:endParaRPr>
           </a:p>
           <a:p>
-            <a:pPr marL="457200" lvl="0" indent="-317500" algn="l" rtl="0">
-              <a:spcBef>
-                <a:spcPts val="0"/>
-              </a:spcBef>
-              <a:spcAft>
-                <a:spcPts val="0"/>
-              </a:spcAft>
+            <a:pPr marL="457200" lvl="0" indent="-317500">
               <a:buSzPts val="1400"/>
               <a:buFont typeface="Google Sans Flex Medium"/>
               <a:buChar char="●"/>
@@ -17517,7 +17511,43 @@
                 <a:cs typeface="Google Sans Flex Medium"/>
                 <a:sym typeface="Google Sans Flex Medium"/>
               </a:rPr>
-              <a:t>Demo Video Link (3 Minutes)</a:t>
+              <a:t>Demo Video Link (3 Minutes) - https://</a:t>
+            </a:r>
+            <a:r>
+              <a:rPr lang="en-GB" dirty="0" err="1">
+                <a:latin typeface="Google Sans Flex Medium"/>
+                <a:ea typeface="Google Sans Flex Medium"/>
+                <a:cs typeface="Google Sans Flex Medium"/>
+                <a:sym typeface="Google Sans Flex Medium"/>
+              </a:rPr>
+              <a:t>www.youtube.com</a:t>
+            </a:r>
+            <a:r>
+              <a:rPr lang="en-GB" dirty="0">
+                <a:latin typeface="Google Sans Flex Medium"/>
+                <a:ea typeface="Google Sans Flex Medium"/>
+                <a:cs typeface="Google Sans Flex Medium"/>
+                <a:sym typeface="Google Sans Flex Medium"/>
+              </a:rPr>
+              <a:t>/</a:t>
+            </a:r>
+            <a:r>
+              <a:rPr lang="en-GB" dirty="0" err="1">
+                <a:latin typeface="Google Sans Flex Medium"/>
+                <a:ea typeface="Google Sans Flex Medium"/>
+                <a:cs typeface="Google Sans Flex Medium"/>
+                <a:sym typeface="Google Sans Flex Medium"/>
+              </a:rPr>
+              <a:t>watch?v</a:t>
+            </a:r>
+            <a:r>
+              <a:rPr lang="en-GB">
+                <a:latin typeface="Google Sans Flex Medium"/>
+                <a:ea typeface="Google Sans Flex Medium"/>
+                <a:cs typeface="Google Sans Flex Medium"/>
+                <a:sym typeface="Google Sans Flex Medium"/>
+              </a:rPr>
+              <a:t>=MD8shu3V4QA</a:t>
             </a:r>
             <a:endParaRPr dirty="0">
               <a:latin typeface="Google Sans Flex Medium"/>
